--- a/ai101/slides/week-09.pptx
+++ b/ai101/slides/week-09.pptx
@@ -12,6 +12,13 @@
     <p:sldId id="260" r:id="rId11"/>
     <p:sldId id="261" r:id="rId12"/>
     <p:sldId id="262" r:id="rId13"/>
+    <p:sldId id="263" r:id="rId14"/>
+    <p:sldId id="264" r:id="rId15"/>
+    <p:sldId id="265" r:id="rId16"/>
+    <p:sldId id="266" r:id="rId17"/>
+    <p:sldId id="267" r:id="rId18"/>
+    <p:sldId id="268" r:id="rId19"/>
+    <p:sldId id="269" r:id="rId20"/>
   </p:sldIdLst>
   <p:sldSz cx="12191695" cy="6858000" type="screen4x3"/>
   <p:notesSz cx="6858000" cy="9144000"/>
@@ -3166,6 +3173,1331 @@
 </p:sld>
 </file>
 
+<file path=ppt/slides/slide10.xml><?xml version="1.0" encoding="utf-8"?>
+<p:sld xmlns:a="http://schemas.openxmlformats.org/drawingml/2006/main" xmlns:p="http://schemas.openxmlformats.org/presentationml/2006/main" xmlns:r="http://schemas.openxmlformats.org/officeDocument/2006/relationships">
+  <p:cSld>
+    <p:bg>
+      <p:bgPr>
+        <a:solidFill>
+          <a:srgbClr val="102127"/>
+        </a:solidFill>
+        <a:effectLst/>
+      </p:bgPr>
+    </p:bg>
+    <p:spTree>
+      <p:nvGrpSpPr>
+        <p:cNvPr id="1" name=""/>
+        <p:cNvGrpSpPr/>
+        <p:nvPr/>
+      </p:nvGrpSpPr>
+      <p:grpSpPr/>
+      <p:sp>
+        <p:nvSpPr>
+          <p:cNvPr id="2" name="TextBox 1"/>
+          <p:cNvSpPr txBox="1"/>
+          <p:nvPr/>
+        </p:nvSpPr>
+        <p:spPr>
+          <a:xfrm>
+            <a:off x="502920" y="274320"/>
+            <a:ext cx="11155680" cy="731520"/>
+          </a:xfrm>
+          <a:prstGeom prst="rect">
+            <a:avLst/>
+          </a:prstGeom>
+          <a:noFill/>
+        </p:spPr>
+        <p:txBody>
+          <a:bodyPr wrap="none">
+            <a:spAutoFit/>
+          </a:bodyPr>
+          <a:lstStyle/>
+          <a:p>
+            <a:r>
+              <a:rPr sz="2600" b="1">
+                <a:solidFill>
+                  <a:srgbClr val="01AEFD"/>
+                </a:solidFill>
+              </a:rPr>
+              <a:t>Type this into script.js  (5 of 7)</a:t>
+            </a:r>
+          </a:p>
+        </p:txBody>
+      </p:sp>
+      <p:sp>
+        <p:nvSpPr>
+          <p:cNvPr id="3" name="TextBox 2"/>
+          <p:cNvSpPr txBox="1"/>
+          <p:nvPr/>
+        </p:nvSpPr>
+        <p:spPr>
+          <a:xfrm>
+            <a:off x="502920" y="1051560"/>
+            <a:ext cx="11155680" cy="5394960"/>
+          </a:xfrm>
+          <a:prstGeom prst="rect">
+            <a:avLst/>
+          </a:prstGeom>
+          <a:noFill/>
+        </p:spPr>
+        <p:txBody>
+          <a:bodyPr wrap="none">
+            <a:spAutoFit/>
+          </a:bodyPr>
+          <a:lstStyle/>
+          <a:p>
+            <a:pPr>
+              <a:spcAft>
+                <a:spcPts val="0"/>
+              </a:spcAft>
+            </a:pPr>
+            <a:r>
+              <a:rPr sz="1400">
+                <a:solidFill>
+                  <a:srgbClr val="6D8C97"/>
+                </a:solidFill>
+                <a:latin typeface="Consolas"/>
+              </a:rPr>
+              <a:t>  68  </a:t>
+            </a:r>
+            <a:r>
+              <a:rPr sz="1400">
+                <a:solidFill>
+                  <a:srgbClr val="DCECEF"/>
+                </a:solidFill>
+                <a:latin typeface="Consolas"/>
+              </a:rPr>
+              <a:t> </a:t>
+            </a:r>
+          </a:p>
+          <a:p>
+            <a:pPr>
+              <a:spcAft>
+                <a:spcPts val="0"/>
+              </a:spcAft>
+            </a:pPr>
+            <a:r>
+              <a:rPr sz="1400">
+                <a:solidFill>
+                  <a:srgbClr val="6D8C97"/>
+                </a:solidFill>
+                <a:latin typeface="Consolas"/>
+              </a:rPr>
+              <a:t>  69  </a:t>
+            </a:r>
+            <a:r>
+              <a:rPr sz="1400">
+                <a:solidFill>
+                  <a:srgbClr val="DCECEF"/>
+                </a:solidFill>
+                <a:latin typeface="Consolas"/>
+              </a:rPr>
+              <a:t>// Week 4: ask the AI a real question.</a:t>
+            </a:r>
+          </a:p>
+          <a:p>
+            <a:pPr>
+              <a:spcAft>
+                <a:spcPts val="0"/>
+              </a:spcAft>
+            </a:pPr>
+            <a:r>
+              <a:rPr sz="1400">
+                <a:solidFill>
+                  <a:srgbClr val="6D8C97"/>
+                </a:solidFill>
+                <a:latin typeface="Consolas"/>
+              </a:rPr>
+              <a:t>  70  </a:t>
+            </a:r>
+            <a:r>
+              <a:rPr sz="1400">
+                <a:solidFill>
+                  <a:srgbClr val="DCECEF"/>
+                </a:solidFill>
+                <a:latin typeface="Consolas"/>
+              </a:rPr>
+              <a:t>// A chat request is a LIST of messages. Each one says who said it.</a:t>
+            </a:r>
+          </a:p>
+          <a:p>
+            <a:pPr>
+              <a:spcAft>
+                <a:spcPts val="0"/>
+              </a:spcAft>
+            </a:pPr>
+            <a:r>
+              <a:rPr sz="1400">
+                <a:solidFill>
+                  <a:srgbClr val="6D8C97"/>
+                </a:solidFill>
+                <a:latin typeface="Consolas"/>
+              </a:rPr>
+              <a:t>  71  </a:t>
+            </a:r>
+            <a:r>
+              <a:rPr sz="1400">
+                <a:solidFill>
+                  <a:srgbClr val="DCECEF"/>
+                </a:solidFill>
+                <a:latin typeface="Consolas"/>
+              </a:rPr>
+              <a:t>async function askAI() {</a:t>
+            </a:r>
+          </a:p>
+          <a:p>
+            <a:pPr>
+              <a:spcAft>
+                <a:spcPts val="0"/>
+              </a:spcAft>
+            </a:pPr>
+            <a:r>
+              <a:rPr sz="1400">
+                <a:solidFill>
+                  <a:srgbClr val="6D8C97"/>
+                </a:solidFill>
+                <a:latin typeface="Consolas"/>
+              </a:rPr>
+              <a:t>  72  </a:t>
+            </a:r>
+            <a:r>
+              <a:rPr sz="1400">
+                <a:solidFill>
+                  <a:srgbClr val="DCECEF"/>
+                </a:solidFill>
+                <a:latin typeface="Consolas"/>
+              </a:rPr>
+              <a:t>  trimHistory();   // week 8: never send more than the server will read</a:t>
+            </a:r>
+          </a:p>
+          <a:p>
+            <a:pPr>
+              <a:spcAft>
+                <a:spcPts val="0"/>
+              </a:spcAft>
+            </a:pPr>
+            <a:r>
+              <a:rPr sz="1400">
+                <a:solidFill>
+                  <a:srgbClr val="6D8C97"/>
+                </a:solidFill>
+                <a:latin typeface="Consolas"/>
+              </a:rPr>
+              <a:t>  73  </a:t>
+            </a:r>
+            <a:r>
+              <a:rPr sz="1400">
+                <a:solidFill>
+                  <a:srgbClr val="DCECEF"/>
+                </a:solidFill>
+                <a:latin typeface="Consolas"/>
+              </a:rPr>
+              <a:t>  const res = await fetch(AI_BASE + '/v1/chat/completions', {</a:t>
+            </a:r>
+          </a:p>
+          <a:p>
+            <a:pPr>
+              <a:spcAft>
+                <a:spcPts val="0"/>
+              </a:spcAft>
+            </a:pPr>
+            <a:r>
+              <a:rPr sz="1400">
+                <a:solidFill>
+                  <a:srgbClr val="6D8C97"/>
+                </a:solidFill>
+                <a:latin typeface="Consolas"/>
+              </a:rPr>
+              <a:t>  74  </a:t>
+            </a:r>
+            <a:r>
+              <a:rPr sz="1400">
+                <a:solidFill>
+                  <a:srgbClr val="DCECEF"/>
+                </a:solidFill>
+                <a:latin typeface="Consolas"/>
+              </a:rPr>
+              <a:t>    method: 'POST',                       // POST = I am sending you something</a:t>
+            </a:r>
+          </a:p>
+          <a:p>
+            <a:pPr>
+              <a:spcAft>
+                <a:spcPts val="0"/>
+              </a:spcAft>
+            </a:pPr>
+            <a:r>
+              <a:rPr sz="1400">
+                <a:solidFill>
+                  <a:srgbClr val="6D8C97"/>
+                </a:solidFill>
+                <a:latin typeface="Consolas"/>
+              </a:rPr>
+              <a:t>  75  </a:t>
+            </a:r>
+            <a:r>
+              <a:rPr sz="1400">
+                <a:solidFill>
+                  <a:srgbClr val="DCECEF"/>
+                </a:solidFill>
+                <a:latin typeface="Consolas"/>
+              </a:rPr>
+              <a:t>    headers: {</a:t>
+            </a:r>
+          </a:p>
+          <a:p>
+            <a:pPr>
+              <a:spcAft>
+                <a:spcPts val="0"/>
+              </a:spcAft>
+            </a:pPr>
+            <a:r>
+              <a:rPr sz="1400">
+                <a:solidFill>
+                  <a:srgbClr val="6D8C97"/>
+                </a:solidFill>
+                <a:latin typeface="Consolas"/>
+              </a:rPr>
+              <a:t>  76  </a:t>
+            </a:r>
+            <a:r>
+              <a:rPr sz="1400">
+                <a:solidFill>
+                  <a:srgbClr val="DCECEF"/>
+                </a:solidFill>
+                <a:latin typeface="Consolas"/>
+              </a:rPr>
+              <a:t>      'Content-Type': 'application/json', // what I am sending is JSON</a:t>
+            </a:r>
+          </a:p>
+          <a:p>
+            <a:pPr>
+              <a:spcAft>
+                <a:spcPts val="0"/>
+              </a:spcAft>
+            </a:pPr>
+            <a:r>
+              <a:rPr sz="1400">
+                <a:solidFill>
+                  <a:srgbClr val="6D8C97"/>
+                </a:solidFill>
+                <a:latin typeface="Consolas"/>
+              </a:rPr>
+              <a:t>  77  </a:t>
+            </a:r>
+            <a:r>
+              <a:rPr sz="1400">
+                <a:solidFill>
+                  <a:srgbClr val="DCECEF"/>
+                </a:solidFill>
+                <a:latin typeface="Consolas"/>
+              </a:rPr>
+              <a:t>      'Authorization': 'Bearer ' + API_KEY</a:t>
+            </a:r>
+          </a:p>
+          <a:p>
+            <a:pPr>
+              <a:spcAft>
+                <a:spcPts val="0"/>
+              </a:spcAft>
+            </a:pPr>
+            <a:r>
+              <a:rPr sz="1400">
+                <a:solidFill>
+                  <a:srgbClr val="6D8C97"/>
+                </a:solidFill>
+                <a:latin typeface="Consolas"/>
+              </a:rPr>
+              <a:t>  78  </a:t>
+            </a:r>
+            <a:r>
+              <a:rPr sz="1400">
+                <a:solidFill>
+                  <a:srgbClr val="DCECEF"/>
+                </a:solidFill>
+                <a:latin typeface="Consolas"/>
+              </a:rPr>
+              <a:t>    },</a:t>
+            </a:r>
+          </a:p>
+          <a:p>
+            <a:pPr>
+              <a:spcAft>
+                <a:spcPts val="0"/>
+              </a:spcAft>
+            </a:pPr>
+            <a:r>
+              <a:rPr sz="1400">
+                <a:solidFill>
+                  <a:srgbClr val="6D8C97"/>
+                </a:solidFill>
+                <a:latin typeface="Consolas"/>
+              </a:rPr>
+              <a:t>  79  </a:t>
+            </a:r>
+            <a:r>
+              <a:rPr sz="1400">
+                <a:solidFill>
+                  <a:srgbClr val="DCECEF"/>
+                </a:solidFill>
+                <a:latin typeface="Consolas"/>
+              </a:rPr>
+              <a:t>    body: JSON.stringify({</a:t>
+            </a:r>
+          </a:p>
+          <a:p>
+            <a:pPr>
+              <a:spcAft>
+                <a:spcPts val="0"/>
+              </a:spcAft>
+            </a:pPr>
+            <a:r>
+              <a:rPr sz="1400">
+                <a:solidFill>
+                  <a:srgbClr val="6D8C97"/>
+                </a:solidFill>
+                <a:latin typeface="Consolas"/>
+              </a:rPr>
+              <a:t>  80  </a:t>
+            </a:r>
+            <a:r>
+              <a:rPr sz="1400">
+                <a:solidFill>
+                  <a:srgbClr val="7FE0A0"/>
+                </a:solidFill>
+                <a:latin typeface="Consolas"/>
+              </a:rPr>
+              <a:t>      model: modelBox.value,                    // week 9: chosen on the page</a:t>
+            </a:r>
+          </a:p>
+          <a:p>
+            <a:pPr>
+              <a:spcAft>
+                <a:spcPts val="0"/>
+              </a:spcAft>
+            </a:pPr>
+            <a:r>
+              <a:rPr sz="1400">
+                <a:solidFill>
+                  <a:srgbClr val="6D8C97"/>
+                </a:solidFill>
+                <a:latin typeface="Consolas"/>
+              </a:rPr>
+              <a:t>  81  </a:t>
+            </a:r>
+            <a:r>
+              <a:rPr sz="1400">
+                <a:solidFill>
+                  <a:srgbClr val="7FE0A0"/>
+                </a:solidFill>
+                <a:latin typeface="Consolas"/>
+              </a:rPr>
+              <a:t>      temperature: Number(tempBox.value),       // 0 = careful, 1.5 = wild</a:t>
+            </a:r>
+          </a:p>
+          <a:p>
+            <a:pPr>
+              <a:spcAft>
+                <a:spcPts val="0"/>
+              </a:spcAft>
+            </a:pPr>
+            <a:r>
+              <a:rPr sz="1400">
+                <a:solidFill>
+                  <a:srgbClr val="6D8C97"/>
+                </a:solidFill>
+                <a:latin typeface="Consolas"/>
+              </a:rPr>
+              <a:t>  82  </a:t>
+            </a:r>
+            <a:r>
+              <a:rPr sz="1400">
+                <a:solidFill>
+                  <a:srgbClr val="DCECEF"/>
+                </a:solidFill>
+                <a:latin typeface="Consolas"/>
+              </a:rPr>
+              <a:t>      messages: [</a:t>
+            </a:r>
+          </a:p>
+        </p:txBody>
+      </p:sp>
+    </p:spTree>
+  </p:cSld>
+  <p:clrMapOvr>
+    <a:masterClrMapping/>
+  </p:clrMapOvr>
+</p:sld>
+</file>
+
+<file path=ppt/slides/slide11.xml><?xml version="1.0" encoding="utf-8"?>
+<p:sld xmlns:a="http://schemas.openxmlformats.org/drawingml/2006/main" xmlns:p="http://schemas.openxmlformats.org/presentationml/2006/main" xmlns:r="http://schemas.openxmlformats.org/officeDocument/2006/relationships">
+  <p:cSld>
+    <p:bg>
+      <p:bgPr>
+        <a:solidFill>
+          <a:srgbClr val="102127"/>
+        </a:solidFill>
+        <a:effectLst/>
+      </p:bgPr>
+    </p:bg>
+    <p:spTree>
+      <p:nvGrpSpPr>
+        <p:cNvPr id="1" name=""/>
+        <p:cNvGrpSpPr/>
+        <p:nvPr/>
+      </p:nvGrpSpPr>
+      <p:grpSpPr/>
+      <p:sp>
+        <p:nvSpPr>
+          <p:cNvPr id="2" name="TextBox 1"/>
+          <p:cNvSpPr txBox="1"/>
+          <p:nvPr/>
+        </p:nvSpPr>
+        <p:spPr>
+          <a:xfrm>
+            <a:off x="502920" y="274320"/>
+            <a:ext cx="11155680" cy="731520"/>
+          </a:xfrm>
+          <a:prstGeom prst="rect">
+            <a:avLst/>
+          </a:prstGeom>
+          <a:noFill/>
+        </p:spPr>
+        <p:txBody>
+          <a:bodyPr wrap="none">
+            <a:spAutoFit/>
+          </a:bodyPr>
+          <a:lstStyle/>
+          <a:p>
+            <a:r>
+              <a:rPr sz="2600" b="1">
+                <a:solidFill>
+                  <a:srgbClr val="01AEFD"/>
+                </a:solidFill>
+              </a:rPr>
+              <a:t>Type this into script.js  (6 of 7)</a:t>
+            </a:r>
+          </a:p>
+        </p:txBody>
+      </p:sp>
+      <p:sp>
+        <p:nvSpPr>
+          <p:cNvPr id="3" name="TextBox 2"/>
+          <p:cNvSpPr txBox="1"/>
+          <p:nvPr/>
+        </p:nvSpPr>
+        <p:spPr>
+          <a:xfrm>
+            <a:off x="502920" y="1051560"/>
+            <a:ext cx="11155680" cy="5394960"/>
+          </a:xfrm>
+          <a:prstGeom prst="rect">
+            <a:avLst/>
+          </a:prstGeom>
+          <a:noFill/>
+        </p:spPr>
+        <p:txBody>
+          <a:bodyPr wrap="none">
+            <a:spAutoFit/>
+          </a:bodyPr>
+          <a:lstStyle/>
+          <a:p>
+            <a:pPr>
+              <a:spcAft>
+                <a:spcPts val="0"/>
+              </a:spcAft>
+            </a:pPr>
+            <a:r>
+              <a:rPr sz="1400">
+                <a:solidFill>
+                  <a:srgbClr val="6D8C97"/>
+                </a:solidFill>
+                <a:latin typeface="Consolas"/>
+              </a:rPr>
+              <a:t>  83  </a:t>
+            </a:r>
+            <a:r>
+              <a:rPr sz="1400">
+                <a:solidFill>
+                  <a:srgbClr val="DCECEF"/>
+                </a:solidFill>
+                <a:latin typeface="Consolas"/>
+              </a:rPr>
+              <a:t>        // Week 6: the standing instruction, read before every single reply.</a:t>
+            </a:r>
+          </a:p>
+          <a:p>
+            <a:pPr>
+              <a:spcAft>
+                <a:spcPts val="0"/>
+              </a:spcAft>
+            </a:pPr>
+            <a:r>
+              <a:rPr sz="1400">
+                <a:solidFill>
+                  <a:srgbClr val="6D8C97"/>
+                </a:solidFill>
+                <a:latin typeface="Consolas"/>
+              </a:rPr>
+              <a:t>  84  </a:t>
+            </a:r>
+            <a:r>
+              <a:rPr sz="1400">
+                <a:solidFill>
+                  <a:srgbClr val="DCECEF"/>
+                </a:solidFill>
+                <a:latin typeface="Consolas"/>
+              </a:rPr>
+              <a:t>        { role: 'system', content: personaBox.value },</a:t>
+            </a:r>
+          </a:p>
+          <a:p>
+            <a:pPr>
+              <a:spcAft>
+                <a:spcPts val="0"/>
+              </a:spcAft>
+            </a:pPr>
+            <a:r>
+              <a:rPr sz="1400">
+                <a:solidFill>
+                  <a:srgbClr val="6D8C97"/>
+                </a:solidFill>
+                <a:latin typeface="Consolas"/>
+              </a:rPr>
+              <a:t>  85  </a:t>
+            </a:r>
+            <a:r>
+              <a:rPr sz="1400">
+                <a:solidFill>
+                  <a:srgbClr val="DCECEF"/>
+                </a:solidFill>
+                <a:latin typeface="Consolas"/>
+              </a:rPr>
+              <a:t>        // Week 7: everything said so far, oldest first.</a:t>
+            </a:r>
+          </a:p>
+          <a:p>
+            <a:pPr>
+              <a:spcAft>
+                <a:spcPts val="0"/>
+              </a:spcAft>
+            </a:pPr>
+            <a:r>
+              <a:rPr sz="1400">
+                <a:solidFill>
+                  <a:srgbClr val="6D8C97"/>
+                </a:solidFill>
+                <a:latin typeface="Consolas"/>
+              </a:rPr>
+              <a:t>  86  </a:t>
+            </a:r>
+            <a:r>
+              <a:rPr sz="1400">
+                <a:solidFill>
+                  <a:srgbClr val="DCECEF"/>
+                </a:solidFill>
+                <a:latin typeface="Consolas"/>
+              </a:rPr>
+              <a:t>        ...history</a:t>
+            </a:r>
+          </a:p>
+          <a:p>
+            <a:pPr>
+              <a:spcAft>
+                <a:spcPts val="0"/>
+              </a:spcAft>
+            </a:pPr>
+            <a:r>
+              <a:rPr sz="1400">
+                <a:solidFill>
+                  <a:srgbClr val="6D8C97"/>
+                </a:solidFill>
+                <a:latin typeface="Consolas"/>
+              </a:rPr>
+              <a:t>  87  </a:t>
+            </a:r>
+            <a:r>
+              <a:rPr sz="1400">
+                <a:solidFill>
+                  <a:srgbClr val="DCECEF"/>
+                </a:solidFill>
+                <a:latin typeface="Consolas"/>
+              </a:rPr>
+              <a:t>      ]</a:t>
+            </a:r>
+          </a:p>
+          <a:p>
+            <a:pPr>
+              <a:spcAft>
+                <a:spcPts val="0"/>
+              </a:spcAft>
+            </a:pPr>
+            <a:r>
+              <a:rPr sz="1400">
+                <a:solidFill>
+                  <a:srgbClr val="6D8C97"/>
+                </a:solidFill>
+                <a:latin typeface="Consolas"/>
+              </a:rPr>
+              <a:t>  88  </a:t>
+            </a:r>
+            <a:r>
+              <a:rPr sz="1400">
+                <a:solidFill>
+                  <a:srgbClr val="DCECEF"/>
+                </a:solidFill>
+                <a:latin typeface="Consolas"/>
+              </a:rPr>
+              <a:t>    })</a:t>
+            </a:r>
+          </a:p>
+          <a:p>
+            <a:pPr>
+              <a:spcAft>
+                <a:spcPts val="0"/>
+              </a:spcAft>
+            </a:pPr>
+            <a:r>
+              <a:rPr sz="1400">
+                <a:solidFill>
+                  <a:srgbClr val="6D8C97"/>
+                </a:solidFill>
+                <a:latin typeface="Consolas"/>
+              </a:rPr>
+              <a:t>  89  </a:t>
+            </a:r>
+            <a:r>
+              <a:rPr sz="1400">
+                <a:solidFill>
+                  <a:srgbClr val="DCECEF"/>
+                </a:solidFill>
+                <a:latin typeface="Consolas"/>
+              </a:rPr>
+              <a:t>  });</a:t>
+            </a:r>
+          </a:p>
+          <a:p>
+            <a:pPr>
+              <a:spcAft>
+                <a:spcPts val="0"/>
+              </a:spcAft>
+            </a:pPr>
+            <a:r>
+              <a:rPr sz="1400">
+                <a:solidFill>
+                  <a:srgbClr val="6D8C97"/>
+                </a:solidFill>
+                <a:latin typeface="Consolas"/>
+              </a:rPr>
+              <a:t>  90  </a:t>
+            </a:r>
+            <a:r>
+              <a:rPr sz="1400">
+                <a:solidFill>
+                  <a:srgbClr val="DCECEF"/>
+                </a:solidFill>
+                <a:latin typeface="Consolas"/>
+              </a:rPr>
+              <a:t> </a:t>
+            </a:r>
+          </a:p>
+          <a:p>
+            <a:pPr>
+              <a:spcAft>
+                <a:spcPts val="0"/>
+              </a:spcAft>
+            </a:pPr>
+            <a:r>
+              <a:rPr sz="1400">
+                <a:solidFill>
+                  <a:srgbClr val="6D8C97"/>
+                </a:solidFill>
+                <a:latin typeface="Consolas"/>
+              </a:rPr>
+              <a:t>  91  </a:t>
+            </a:r>
+            <a:r>
+              <a:rPr sz="1400">
+                <a:solidFill>
+                  <a:srgbClr val="DCECEF"/>
+                </a:solidFill>
+                <a:latin typeface="Consolas"/>
+              </a:rPr>
+              <a:t>  // Week 5: fetch does NOT throw when the server says no. A 429 arrives</a:t>
+            </a:r>
+          </a:p>
+          <a:p>
+            <a:pPr>
+              <a:spcAft>
+                <a:spcPts val="0"/>
+              </a:spcAft>
+            </a:pPr>
+            <a:r>
+              <a:rPr sz="1400">
+                <a:solidFill>
+                  <a:srgbClr val="6D8C97"/>
+                </a:solidFill>
+                <a:latin typeface="Consolas"/>
+              </a:rPr>
+              <a:t>  92  </a:t>
+            </a:r>
+            <a:r>
+              <a:rPr sz="1400">
+                <a:solidFill>
+                  <a:srgbClr val="DCECEF"/>
+                </a:solidFill>
+                <a:latin typeface="Consolas"/>
+              </a:rPr>
+              <a:t>  // looking just like a success until you actually check.</a:t>
+            </a:r>
+          </a:p>
+          <a:p>
+            <a:pPr>
+              <a:spcAft>
+                <a:spcPts val="0"/>
+              </a:spcAft>
+            </a:pPr>
+            <a:r>
+              <a:rPr sz="1400">
+                <a:solidFill>
+                  <a:srgbClr val="6D8C97"/>
+                </a:solidFill>
+                <a:latin typeface="Consolas"/>
+              </a:rPr>
+              <a:t>  93  </a:t>
+            </a:r>
+            <a:r>
+              <a:rPr sz="1400">
+                <a:solidFill>
+                  <a:srgbClr val="DCECEF"/>
+                </a:solidFill>
+                <a:latin typeface="Consolas"/>
+              </a:rPr>
+              <a:t>  if (!res.ok) {</a:t>
+            </a:r>
+          </a:p>
+          <a:p>
+            <a:pPr>
+              <a:spcAft>
+                <a:spcPts val="0"/>
+              </a:spcAft>
+            </a:pPr>
+            <a:r>
+              <a:rPr sz="1400">
+                <a:solidFill>
+                  <a:srgbClr val="6D8C97"/>
+                </a:solidFill>
+                <a:latin typeface="Consolas"/>
+              </a:rPr>
+              <a:t>  94  </a:t>
+            </a:r>
+            <a:r>
+              <a:rPr sz="1400">
+                <a:solidFill>
+                  <a:srgbClr val="DCECEF"/>
+                </a:solidFill>
+                <a:latin typeface="Consolas"/>
+              </a:rPr>
+              <a:t>    const problem = await res.json();</a:t>
+            </a:r>
+          </a:p>
+          <a:p>
+            <a:pPr>
+              <a:spcAft>
+                <a:spcPts val="0"/>
+              </a:spcAft>
+            </a:pPr>
+            <a:r>
+              <a:rPr sz="1400">
+                <a:solidFill>
+                  <a:srgbClr val="6D8C97"/>
+                </a:solidFill>
+                <a:latin typeface="Consolas"/>
+              </a:rPr>
+              <a:t>  95  </a:t>
+            </a:r>
+            <a:r>
+              <a:rPr sz="1400">
+                <a:solidFill>
+                  <a:srgbClr val="DCECEF"/>
+                </a:solidFill>
+                <a:latin typeface="Consolas"/>
+              </a:rPr>
+              <a:t>    throw new Error(explain(res.status, problem));</a:t>
+            </a:r>
+          </a:p>
+          <a:p>
+            <a:pPr>
+              <a:spcAft>
+                <a:spcPts val="0"/>
+              </a:spcAft>
+            </a:pPr>
+            <a:r>
+              <a:rPr sz="1400">
+                <a:solidFill>
+                  <a:srgbClr val="6D8C97"/>
+                </a:solidFill>
+                <a:latin typeface="Consolas"/>
+              </a:rPr>
+              <a:t>  96  </a:t>
+            </a:r>
+            <a:r>
+              <a:rPr sz="1400">
+                <a:solidFill>
+                  <a:srgbClr val="DCECEF"/>
+                </a:solidFill>
+                <a:latin typeface="Consolas"/>
+              </a:rPr>
+              <a:t>  }</a:t>
+            </a:r>
+          </a:p>
+          <a:p>
+            <a:pPr>
+              <a:spcAft>
+                <a:spcPts val="0"/>
+              </a:spcAft>
+            </a:pPr>
+            <a:r>
+              <a:rPr sz="1400">
+                <a:solidFill>
+                  <a:srgbClr val="6D8C97"/>
+                </a:solidFill>
+                <a:latin typeface="Consolas"/>
+              </a:rPr>
+              <a:t>  97  </a:t>
+            </a:r>
+            <a:r>
+              <a:rPr sz="1400">
+                <a:solidFill>
+                  <a:srgbClr val="DCECEF"/>
+                </a:solidFill>
+                <a:latin typeface="Consolas"/>
+              </a:rPr>
+              <a:t> </a:t>
+            </a:r>
+          </a:p>
+        </p:txBody>
+      </p:sp>
+    </p:spTree>
+  </p:cSld>
+  <p:clrMapOvr>
+    <a:masterClrMapping/>
+  </p:clrMapOvr>
+</p:sld>
+</file>
+
+<file path=ppt/slides/slide12.xml><?xml version="1.0" encoding="utf-8"?>
+<p:sld xmlns:a="http://schemas.openxmlformats.org/drawingml/2006/main" xmlns:p="http://schemas.openxmlformats.org/presentationml/2006/main" xmlns:r="http://schemas.openxmlformats.org/officeDocument/2006/relationships">
+  <p:cSld>
+    <p:bg>
+      <p:bgPr>
+        <a:solidFill>
+          <a:srgbClr val="102127"/>
+        </a:solidFill>
+        <a:effectLst/>
+      </p:bgPr>
+    </p:bg>
+    <p:spTree>
+      <p:nvGrpSpPr>
+        <p:cNvPr id="1" name=""/>
+        <p:cNvGrpSpPr/>
+        <p:nvPr/>
+      </p:nvGrpSpPr>
+      <p:grpSpPr/>
+      <p:sp>
+        <p:nvSpPr>
+          <p:cNvPr id="2" name="TextBox 1"/>
+          <p:cNvSpPr txBox="1"/>
+          <p:nvPr/>
+        </p:nvSpPr>
+        <p:spPr>
+          <a:xfrm>
+            <a:off x="502920" y="274320"/>
+            <a:ext cx="11155680" cy="731520"/>
+          </a:xfrm>
+          <a:prstGeom prst="rect">
+            <a:avLst/>
+          </a:prstGeom>
+          <a:noFill/>
+        </p:spPr>
+        <p:txBody>
+          <a:bodyPr wrap="none">
+            <a:spAutoFit/>
+          </a:bodyPr>
+          <a:lstStyle/>
+          <a:p>
+            <a:r>
+              <a:rPr sz="2600" b="1">
+                <a:solidFill>
+                  <a:srgbClr val="01AEFD"/>
+                </a:solidFill>
+              </a:rPr>
+              <a:t>Type this into script.js  (7 of 7)</a:t>
+            </a:r>
+          </a:p>
+        </p:txBody>
+      </p:sp>
+      <p:sp>
+        <p:nvSpPr>
+          <p:cNvPr id="3" name="TextBox 2"/>
+          <p:cNvSpPr txBox="1"/>
+          <p:nvPr/>
+        </p:nvSpPr>
+        <p:spPr>
+          <a:xfrm>
+            <a:off x="502920" y="1051560"/>
+            <a:ext cx="11155680" cy="5394960"/>
+          </a:xfrm>
+          <a:prstGeom prst="rect">
+            <a:avLst/>
+          </a:prstGeom>
+          <a:noFill/>
+        </p:spPr>
+        <p:txBody>
+          <a:bodyPr wrap="none">
+            <a:spAutoFit/>
+          </a:bodyPr>
+          <a:lstStyle/>
+          <a:p>
+            <a:pPr>
+              <a:spcAft>
+                <a:spcPts val="0"/>
+              </a:spcAft>
+            </a:pPr>
+            <a:r>
+              <a:rPr sz="1700">
+                <a:solidFill>
+                  <a:srgbClr val="6D8C97"/>
+                </a:solidFill>
+                <a:latin typeface="Consolas"/>
+              </a:rPr>
+              <a:t>  98  </a:t>
+            </a:r>
+            <a:r>
+              <a:rPr sz="1700">
+                <a:solidFill>
+                  <a:srgbClr val="DCECEF"/>
+                </a:solidFill>
+                <a:latin typeface="Consolas"/>
+              </a:rPr>
+              <a:t>  const data = await res.json();</a:t>
+            </a:r>
+          </a:p>
+          <a:p>
+            <a:pPr>
+              <a:spcAft>
+                <a:spcPts val="0"/>
+              </a:spcAft>
+            </a:pPr>
+            <a:r>
+              <a:rPr sz="1700">
+                <a:solidFill>
+                  <a:srgbClr val="6D8C97"/>
+                </a:solidFill>
+                <a:latin typeface="Consolas"/>
+              </a:rPr>
+              <a:t>  99  </a:t>
+            </a:r>
+            <a:r>
+              <a:rPr sz="1700">
+                <a:solidFill>
+                  <a:srgbClr val="DCECEF"/>
+                </a:solidFill>
+                <a:latin typeface="Consolas"/>
+              </a:rPr>
+              <a:t>  return data.choices[0].message.content;</a:t>
+            </a:r>
+          </a:p>
+          <a:p>
+            <a:pPr>
+              <a:spcAft>
+                <a:spcPts val="0"/>
+              </a:spcAft>
+            </a:pPr>
+            <a:r>
+              <a:rPr sz="1700">
+                <a:solidFill>
+                  <a:srgbClr val="6D8C97"/>
+                </a:solidFill>
+                <a:latin typeface="Consolas"/>
+              </a:rPr>
+              <a:t> 100  </a:t>
+            </a:r>
+            <a:r>
+              <a:rPr sz="1700">
+                <a:solidFill>
+                  <a:srgbClr val="DCECEF"/>
+                </a:solidFill>
+                <a:latin typeface="Consolas"/>
+              </a:rPr>
+              <a:t>}</a:t>
+            </a:r>
+          </a:p>
+        </p:txBody>
+      </p:sp>
+    </p:spTree>
+  </p:cSld>
+  <p:clrMapOvr>
+    <a:masterClrMapping/>
+  </p:clrMapOvr>
+</p:sld>
+</file>
+
+<file path=ppt/slides/slide13.xml><?xml version="1.0" encoding="utf-8"?>
+<p:sld xmlns:a="http://schemas.openxmlformats.org/drawingml/2006/main" xmlns:p="http://schemas.openxmlformats.org/presentationml/2006/main" xmlns:r="http://schemas.openxmlformats.org/officeDocument/2006/relationships">
+  <p:cSld>
+    <p:spTree>
+      <p:nvGrpSpPr>
+        <p:cNvPr id="1" name=""/>
+        <p:cNvGrpSpPr/>
+        <p:nvPr/>
+      </p:nvGrpSpPr>
+      <p:grpSpPr/>
+      <p:sp>
+        <p:nvSpPr>
+          <p:cNvPr id="2" name="Title 1"/>
+          <p:cNvSpPr>
+            <a:spLocks noGrp="1"/>
+          </p:cNvSpPr>
+          <p:nvPr>
+            <p:ph type="title"/>
+          </p:nvPr>
+        </p:nvSpPr>
+        <p:spPr/>
+        <p:txBody>
+          <a:bodyPr/>
+          <a:lstStyle/>
+          <a:p>
+            <a:r>
+              <a:rPr sz="3800" b="1">
+                <a:solidFill>
+                  <a:srgbClr val="1F2A37"/>
+                </a:solidFill>
+              </a:rPr>
+              <a:t>Change ONE thing</a:t>
+            </a:r>
+          </a:p>
+        </p:txBody>
+      </p:sp>
+      <p:sp>
+        <p:nvSpPr>
+          <p:cNvPr id="3" name="TextBox 2"/>
+          <p:cNvSpPr txBox="1"/>
+          <p:nvPr/>
+        </p:nvSpPr>
+        <p:spPr>
+          <a:xfrm>
+            <a:off x="822960" y="1828800"/>
+            <a:ext cx="10515600" cy="4206240"/>
+          </a:xfrm>
+          <a:prstGeom prst="rect">
+            <a:avLst/>
+          </a:prstGeom>
+          <a:noFill/>
+        </p:spPr>
+        <p:txBody>
+          <a:bodyPr wrap="square">
+            <a:spAutoFit/>
+          </a:bodyPr>
+          <a:lstStyle/>
+          <a:p>
+            <a:pPr>
+              <a:spcAft>
+                <a:spcPts val="1400"/>
+              </a:spcAft>
+            </a:pPr>
+            <a:r>
+              <a:rPr sz="2800">
+                <a:solidFill>
+                  <a:srgbClr val="01AEFD"/>
+                </a:solidFill>
+              </a:rPr>
+              <a:t>The rule of a fair experiment</a:t>
+            </a:r>
+          </a:p>
+          <a:p>
+            <a:pPr>
+              <a:spcAft>
+                <a:spcPts val="1400"/>
+              </a:spcAft>
+            </a:pPr>
+            <a:r>
+              <a:rPr sz="2400">
+                <a:solidFill>
+                  <a:srgbClr val="1F2A37"/>
+                </a:solidFill>
+              </a:rPr>
+              <a:t>• fast / 0</a:t>
+            </a:r>
+          </a:p>
+          <a:p>
+            <a:pPr>
+              <a:spcAft>
+                <a:spcPts val="1400"/>
+              </a:spcAft>
+            </a:pPr>
+            <a:r>
+              <a:rPr sz="2400">
+                <a:solidFill>
+                  <a:srgbClr val="1F2A37"/>
+                </a:solidFill>
+              </a:rPr>
+              <a:t>• fast / 1.4</a:t>
+            </a:r>
+          </a:p>
+          <a:p>
+            <a:pPr>
+              <a:spcAft>
+                <a:spcPts val="1400"/>
+              </a:spcAft>
+            </a:pPr>
+            <a:r>
+              <a:rPr sz="2400">
+                <a:solidFill>
+                  <a:srgbClr val="1F2A37"/>
+                </a:solidFill>
+              </a:rPr>
+              <a:t>• smart / 0</a:t>
+            </a:r>
+          </a:p>
+          <a:p>
+            <a:pPr>
+              <a:spcAft>
+                <a:spcPts val="1400"/>
+              </a:spcAft>
+            </a:pPr>
+            <a:r>
+              <a:rPr sz="2400">
+                <a:solidFill>
+                  <a:srgbClr val="1F2A37"/>
+                </a:solidFill>
+              </a:rPr>
+              <a:t>• smart / 1.4</a:t>
+            </a:r>
+          </a:p>
+        </p:txBody>
+      </p:sp>
+    </p:spTree>
+  </p:cSld>
+  <p:clrMapOvr>
+    <a:masterClrMapping/>
+  </p:clrMapOvr>
+</p:sld>
+</file>
+
+<file path=ppt/slides/slide14.xml><?xml version="1.0" encoding="utf-8"?>
+<p:sld xmlns:a="http://schemas.openxmlformats.org/drawingml/2006/main" xmlns:p="http://schemas.openxmlformats.org/presentationml/2006/main" xmlns:r="http://schemas.openxmlformats.org/officeDocument/2006/relationships">
+  <p:cSld>
+    <p:spTree>
+      <p:nvGrpSpPr>
+        <p:cNvPr id="1" name=""/>
+        <p:cNvGrpSpPr/>
+        <p:nvPr/>
+      </p:nvGrpSpPr>
+      <p:grpSpPr/>
+      <p:sp>
+        <p:nvSpPr>
+          <p:cNvPr id="2" name="Title 1"/>
+          <p:cNvSpPr>
+            <a:spLocks noGrp="1"/>
+          </p:cNvSpPr>
+          <p:nvPr>
+            <p:ph type="title"/>
+          </p:nvPr>
+        </p:nvSpPr>
+        <p:spPr/>
+        <p:txBody>
+          <a:bodyPr/>
+          <a:lstStyle/>
+          <a:p>
+            <a:r>
+              <a:rPr sz="3800" b="1">
+                <a:solidFill>
+                  <a:srgbClr val="1F2A37"/>
+                </a:solidFill>
+              </a:rPr>
+              <a:t>Report back</a:t>
+            </a:r>
+          </a:p>
+        </p:txBody>
+      </p:sp>
+      <p:sp>
+        <p:nvSpPr>
+          <p:cNvPr id="3" name="TextBox 2"/>
+          <p:cNvSpPr txBox="1"/>
+          <p:nvPr/>
+        </p:nvSpPr>
+        <p:spPr>
+          <a:xfrm>
+            <a:off x="822960" y="1828800"/>
+            <a:ext cx="10515600" cy="4206240"/>
+          </a:xfrm>
+          <a:prstGeom prst="rect">
+            <a:avLst/>
+          </a:prstGeom>
+          <a:noFill/>
+        </p:spPr>
+        <p:txBody>
+          <a:bodyPr wrap="square">
+            <a:spAutoFit/>
+          </a:bodyPr>
+          <a:lstStyle/>
+          <a:p>
+            <a:pPr>
+              <a:spcAft>
+                <a:spcPts val="1400"/>
+              </a:spcAft>
+            </a:pPr>
+            <a:r>
+              <a:rPr sz="2800">
+                <a:solidFill>
+                  <a:srgbClr val="01AEFD"/>
+                </a:solidFill>
+              </a:rPr>
+              <a:t>Evidence, not opinion</a:t>
+            </a:r>
+          </a:p>
+          <a:p>
+            <a:pPr>
+              <a:spcAft>
+                <a:spcPts val="1400"/>
+              </a:spcAft>
+            </a:pPr>
+            <a:r>
+              <a:rPr sz="2400">
+                <a:solidFill>
+                  <a:srgbClr val="1F2A37"/>
+                </a:solidFill>
+              </a:rPr>
+              <a:t>• "smart is better" - weak</a:t>
+            </a:r>
+          </a:p>
+          <a:p>
+            <a:pPr>
+              <a:spcAft>
+                <a:spcPts val="1400"/>
+              </a:spcAft>
+            </a:pPr>
+            <a:r>
+              <a:rPr sz="2400">
+                <a:solidFill>
+                  <a:srgbClr val="1F2A37"/>
+                </a:solidFill>
+              </a:rPr>
+              <a:t>• "smart kept the 40-word rule, fast ignored it" - strong</a:t>
+            </a:r>
+          </a:p>
+        </p:txBody>
+      </p:sp>
+    </p:spTree>
+  </p:cSld>
+  <p:clrMapOvr>
+    <a:masterClrMapping/>
+  </p:clrMapOvr>
+</p:sld>
+</file>
+
 <file path=ppt/slides/slide2.xml><?xml version="1.0" encoding="utf-8"?>
 <p:sld xmlns:a="http://schemas.openxmlformats.org/drawingml/2006/main" xmlns:p="http://schemas.openxmlformats.org/presentationml/2006/main" xmlns:r="http://schemas.openxmlformats.org/officeDocument/2006/relationships">
   <p:cSld>
@@ -3632,6 +4964,14 @@
 <file path=ppt/slides/slide6.xml><?xml version="1.0" encoding="utf-8"?>
 <p:sld xmlns:a="http://schemas.openxmlformats.org/drawingml/2006/main" xmlns:p="http://schemas.openxmlformats.org/presentationml/2006/main" xmlns:r="http://schemas.openxmlformats.org/officeDocument/2006/relationships">
   <p:cSld>
+    <p:bg>
+      <p:bgPr>
+        <a:solidFill>
+          <a:srgbClr val="102127"/>
+        </a:solidFill>
+        <a:effectLst/>
+      </p:bgPr>
+    </p:bg>
     <p:spTree>
       <p:nvGrpSpPr>
         <p:cNvPr id="1" name=""/>
@@ -3641,40 +4981,14 @@
       <p:grpSpPr/>
       <p:sp>
         <p:nvSpPr>
-          <p:cNvPr id="2" name="Title 1"/>
-          <p:cNvSpPr>
-            <a:spLocks noGrp="1"/>
-          </p:cNvSpPr>
-          <p:nvPr>
-            <p:ph type="title"/>
-          </p:nvPr>
-        </p:nvSpPr>
-        <p:spPr/>
-        <p:txBody>
-          <a:bodyPr/>
-          <a:lstStyle/>
-          <a:p>
-            <a:r>
-              <a:rPr sz="3800" b="1">
-                <a:solidFill>
-                  <a:srgbClr val="1F2A37"/>
-                </a:solidFill>
-              </a:rPr>
-              <a:t>Change ONE thing</a:t>
-            </a:r>
-          </a:p>
-        </p:txBody>
-      </p:sp>
-      <p:sp>
-        <p:nvSpPr>
-          <p:cNvPr id="3" name="TextBox 2"/>
+          <p:cNvPr id="2" name="TextBox 1"/>
           <p:cNvSpPr txBox="1"/>
           <p:nvPr/>
         </p:nvSpPr>
         <p:spPr>
           <a:xfrm>
-            <a:off x="822960" y="1828800"/>
-            <a:ext cx="10515600" cy="4206240"/>
+            <a:off x="502920" y="274320"/>
+            <a:ext cx="11155680" cy="731520"/>
           </a:xfrm>
           <a:prstGeom prst="rect">
             <a:avLst/>
@@ -3682,83 +4996,316 @@
           <a:noFill/>
         </p:spPr>
         <p:txBody>
-          <a:bodyPr wrap="square">
+          <a:bodyPr wrap="none">
             <a:spAutoFit/>
           </a:bodyPr>
           <a:lstStyle/>
           <a:p>
-            <a:pPr>
-              <a:spcAft>
-                <a:spcPts val="1400"/>
-              </a:spcAft>
-            </a:pPr>
-            <a:r>
-              <a:rPr sz="2800">
+            <a:r>
+              <a:rPr sz="2600" b="1">
                 <a:solidFill>
                   <a:srgbClr val="01AEFD"/>
                 </a:solidFill>
               </a:rPr>
-              <a:t>The rule of a fair experiment</a:t>
-            </a:r>
-          </a:p>
-          <a:p>
-            <a:pPr>
-              <a:spcAft>
-                <a:spcPts val="1400"/>
-              </a:spcAft>
-            </a:pPr>
-            <a:r>
-              <a:rPr sz="2400">
-                <a:solidFill>
-                  <a:srgbClr val="1F2A37"/>
-                </a:solidFill>
-              </a:rPr>
-              <a:t>• fast / 0</a:t>
-            </a:r>
-          </a:p>
-          <a:p>
-            <a:pPr>
-              <a:spcAft>
-                <a:spcPts val="1400"/>
-              </a:spcAft>
-            </a:pPr>
-            <a:r>
-              <a:rPr sz="2400">
-                <a:solidFill>
-                  <a:srgbClr val="1F2A37"/>
-                </a:solidFill>
-              </a:rPr>
-              <a:t>• fast / 1.4</a:t>
-            </a:r>
-          </a:p>
-          <a:p>
-            <a:pPr>
-              <a:spcAft>
-                <a:spcPts val="1400"/>
-              </a:spcAft>
-            </a:pPr>
-            <a:r>
-              <a:rPr sz="2400">
-                <a:solidFill>
-                  <a:srgbClr val="1F2A37"/>
-                </a:solidFill>
-              </a:rPr>
-              <a:t>• smart / 0</a:t>
-            </a:r>
-          </a:p>
-          <a:p>
-            <a:pPr>
-              <a:spcAft>
-                <a:spcPts val="1400"/>
-              </a:spcAft>
-            </a:pPr>
-            <a:r>
-              <a:rPr sz="2400">
-                <a:solidFill>
-                  <a:srgbClr val="1F2A37"/>
-                </a:solidFill>
-              </a:rPr>
-              <a:t>• smart / 1.4</a:t>
+              <a:t>Type this into index.html  (1 of 7)</a:t>
+            </a:r>
+          </a:p>
+        </p:txBody>
+      </p:sp>
+      <p:sp>
+        <p:nvSpPr>
+          <p:cNvPr id="3" name="TextBox 2"/>
+          <p:cNvSpPr txBox="1"/>
+          <p:nvPr/>
+        </p:nvSpPr>
+        <p:spPr>
+          <a:xfrm>
+            <a:off x="502920" y="1051560"/>
+            <a:ext cx="11155680" cy="5394960"/>
+          </a:xfrm>
+          <a:prstGeom prst="rect">
+            <a:avLst/>
+          </a:prstGeom>
+          <a:noFill/>
+        </p:spPr>
+        <p:txBody>
+          <a:bodyPr wrap="none">
+            <a:spAutoFit/>
+          </a:bodyPr>
+          <a:lstStyle/>
+          <a:p>
+            <a:pPr>
+              <a:spcAft>
+                <a:spcPts val="0"/>
+              </a:spcAft>
+            </a:pPr>
+            <a:r>
+              <a:rPr sz="1700">
+                <a:solidFill>
+                  <a:srgbClr val="6D8C97"/>
+                </a:solidFill>
+                <a:latin typeface="Consolas"/>
+              </a:rPr>
+              <a:t>  10  </a:t>
+            </a:r>
+            <a:r>
+              <a:rPr sz="1700">
+                <a:solidFill>
+                  <a:srgbClr val="7FE0A0"/>
+                </a:solidFill>
+                <a:latin typeface="Consolas"/>
+              </a:rPr>
+              <a:t>  &lt;div class="controls"&gt;</a:t>
+            </a:r>
+          </a:p>
+          <a:p>
+            <a:pPr>
+              <a:spcAft>
+                <a:spcPts val="0"/>
+              </a:spcAft>
+            </a:pPr>
+            <a:r>
+              <a:rPr sz="1700">
+                <a:solidFill>
+                  <a:srgbClr val="6D8C97"/>
+                </a:solidFill>
+                <a:latin typeface="Consolas"/>
+              </a:rPr>
+              <a:t>  11  </a:t>
+            </a:r>
+            <a:r>
+              <a:rPr sz="1700">
+                <a:solidFill>
+                  <a:srgbClr val="7FE0A0"/>
+                </a:solidFill>
+                <a:latin typeface="Consolas"/>
+              </a:rPr>
+              <a:t>    &lt;label&gt;Brain</a:t>
+            </a:r>
+          </a:p>
+          <a:p>
+            <a:pPr>
+              <a:spcAft>
+                <a:spcPts val="0"/>
+              </a:spcAft>
+            </a:pPr>
+            <a:r>
+              <a:rPr sz="1700">
+                <a:solidFill>
+                  <a:srgbClr val="6D8C97"/>
+                </a:solidFill>
+                <a:latin typeface="Consolas"/>
+              </a:rPr>
+              <a:t>  12  </a:t>
+            </a:r>
+            <a:r>
+              <a:rPr sz="1700">
+                <a:solidFill>
+                  <a:srgbClr val="7FE0A0"/>
+                </a:solidFill>
+                <a:latin typeface="Consolas"/>
+              </a:rPr>
+              <a:t>      &lt;select id="model"&gt;</a:t>
+            </a:r>
+          </a:p>
+          <a:p>
+            <a:pPr>
+              <a:spcAft>
+                <a:spcPts val="0"/>
+              </a:spcAft>
+            </a:pPr>
+            <a:r>
+              <a:rPr sz="1700">
+                <a:solidFill>
+                  <a:srgbClr val="6D8C97"/>
+                </a:solidFill>
+                <a:latin typeface="Consolas"/>
+              </a:rPr>
+              <a:t>  13  </a:t>
+            </a:r>
+            <a:r>
+              <a:rPr sz="1700">
+                <a:solidFill>
+                  <a:srgbClr val="7FE0A0"/>
+                </a:solidFill>
+                <a:latin typeface="Consolas"/>
+              </a:rPr>
+              <a:t>        &lt;option value="fast"&gt;fast &amp;ndash; quick, a bit simple&lt;/option&gt;</a:t>
+            </a:r>
+          </a:p>
+          <a:p>
+            <a:pPr>
+              <a:spcAft>
+                <a:spcPts val="0"/>
+              </a:spcAft>
+            </a:pPr>
+            <a:r>
+              <a:rPr sz="1700">
+                <a:solidFill>
+                  <a:srgbClr val="6D8C97"/>
+                </a:solidFill>
+                <a:latin typeface="Consolas"/>
+              </a:rPr>
+              <a:t>  14  </a:t>
+            </a:r>
+            <a:r>
+              <a:rPr sz="1700">
+                <a:solidFill>
+                  <a:srgbClr val="7FE0A0"/>
+                </a:solidFill>
+                <a:latin typeface="Consolas"/>
+              </a:rPr>
+              <a:t>        &lt;option value="smart"&gt;smart &amp;ndash; better, slower&lt;/option&gt;</a:t>
+            </a:r>
+          </a:p>
+          <a:p>
+            <a:pPr>
+              <a:spcAft>
+                <a:spcPts val="0"/>
+              </a:spcAft>
+            </a:pPr>
+            <a:r>
+              <a:rPr sz="1700">
+                <a:solidFill>
+                  <a:srgbClr val="6D8C97"/>
+                </a:solidFill>
+                <a:latin typeface="Consolas"/>
+              </a:rPr>
+              <a:t>  15  </a:t>
+            </a:r>
+            <a:r>
+              <a:rPr sz="1700">
+                <a:solidFill>
+                  <a:srgbClr val="7FE0A0"/>
+                </a:solidFill>
+                <a:latin typeface="Consolas"/>
+              </a:rPr>
+              <a:t>      &lt;/select&gt;</a:t>
+            </a:r>
+          </a:p>
+          <a:p>
+            <a:pPr>
+              <a:spcAft>
+                <a:spcPts val="0"/>
+              </a:spcAft>
+            </a:pPr>
+            <a:r>
+              <a:rPr sz="1700">
+                <a:solidFill>
+                  <a:srgbClr val="6D8C97"/>
+                </a:solidFill>
+                <a:latin typeface="Consolas"/>
+              </a:rPr>
+              <a:t>  16  </a:t>
+            </a:r>
+            <a:r>
+              <a:rPr sz="1700">
+                <a:solidFill>
+                  <a:srgbClr val="7FE0A0"/>
+                </a:solidFill>
+                <a:latin typeface="Consolas"/>
+              </a:rPr>
+              <a:t>    &lt;/label&gt;</a:t>
+            </a:r>
+          </a:p>
+          <a:p>
+            <a:pPr>
+              <a:spcAft>
+                <a:spcPts val="0"/>
+              </a:spcAft>
+            </a:pPr>
+            <a:r>
+              <a:rPr sz="1700">
+                <a:solidFill>
+                  <a:srgbClr val="6D8C97"/>
+                </a:solidFill>
+                <a:latin typeface="Consolas"/>
+              </a:rPr>
+              <a:t>  17  </a:t>
+            </a:r>
+            <a:r>
+              <a:rPr sz="1700">
+                <a:solidFill>
+                  <a:srgbClr val="7FE0A0"/>
+                </a:solidFill>
+                <a:latin typeface="Consolas"/>
+              </a:rPr>
+              <a:t>    &lt;label&gt;Imagination &lt;output id="tempOut"&gt;0.7&lt;/output&gt;</a:t>
+            </a:r>
+          </a:p>
+          <a:p>
+            <a:pPr>
+              <a:spcAft>
+                <a:spcPts val="0"/>
+              </a:spcAft>
+            </a:pPr>
+            <a:r>
+              <a:rPr sz="1700">
+                <a:solidFill>
+                  <a:srgbClr val="6D8C97"/>
+                </a:solidFill>
+                <a:latin typeface="Consolas"/>
+              </a:rPr>
+              <a:t>  18  </a:t>
+            </a:r>
+            <a:r>
+              <a:rPr sz="1700">
+                <a:solidFill>
+                  <a:srgbClr val="7FE0A0"/>
+                </a:solidFill>
+                <a:latin typeface="Consolas"/>
+              </a:rPr>
+              <a:t>      &lt;input id="temp" type="range" min="0" max="1.5" step="0.1" value="0.7"&gt;</a:t>
+            </a:r>
+          </a:p>
+          <a:p>
+            <a:pPr>
+              <a:spcAft>
+                <a:spcPts val="0"/>
+              </a:spcAft>
+            </a:pPr>
+            <a:r>
+              <a:rPr sz="1700">
+                <a:solidFill>
+                  <a:srgbClr val="6D8C97"/>
+                </a:solidFill>
+                <a:latin typeface="Consolas"/>
+              </a:rPr>
+              <a:t>  19  </a:t>
+            </a:r>
+            <a:r>
+              <a:rPr sz="1700">
+                <a:solidFill>
+                  <a:srgbClr val="7FE0A0"/>
+                </a:solidFill>
+                <a:latin typeface="Consolas"/>
+              </a:rPr>
+              <a:t>    &lt;/label&gt;</a:t>
+            </a:r>
+          </a:p>
+          <a:p>
+            <a:pPr>
+              <a:spcAft>
+                <a:spcPts val="0"/>
+              </a:spcAft>
+            </a:pPr>
+            <a:r>
+              <a:rPr sz="1700">
+                <a:solidFill>
+                  <a:srgbClr val="6D8C97"/>
+                </a:solidFill>
+                <a:latin typeface="Consolas"/>
+              </a:rPr>
+              <a:t>  20  </a:t>
+            </a:r>
+            <a:r>
+              <a:rPr sz="1700">
+                <a:solidFill>
+                  <a:srgbClr val="7FE0A0"/>
+                </a:solidFill>
+                <a:latin typeface="Consolas"/>
+              </a:rPr>
+              <a:t>  &lt;/div&gt;</a:t>
             </a:r>
           </a:p>
         </p:txBody>
@@ -3774,6 +5321,14 @@
 <file path=ppt/slides/slide7.xml><?xml version="1.0" encoding="utf-8"?>
 <p:sld xmlns:a="http://schemas.openxmlformats.org/drawingml/2006/main" xmlns:p="http://schemas.openxmlformats.org/presentationml/2006/main" xmlns:r="http://schemas.openxmlformats.org/officeDocument/2006/relationships">
   <p:cSld>
+    <p:bg>
+      <p:bgPr>
+        <a:solidFill>
+          <a:srgbClr val="102127"/>
+        </a:solidFill>
+        <a:effectLst/>
+      </p:bgPr>
+    </p:bg>
     <p:spTree>
       <p:nvGrpSpPr>
         <p:cNvPr id="1" name=""/>
@@ -3783,40 +5338,14 @@
       <p:grpSpPr/>
       <p:sp>
         <p:nvSpPr>
-          <p:cNvPr id="2" name="Title 1"/>
-          <p:cNvSpPr>
-            <a:spLocks noGrp="1"/>
-          </p:cNvSpPr>
-          <p:nvPr>
-            <p:ph type="title"/>
-          </p:nvPr>
-        </p:nvSpPr>
-        <p:spPr/>
-        <p:txBody>
-          <a:bodyPr/>
-          <a:lstStyle/>
-          <a:p>
-            <a:r>
-              <a:rPr sz="3800" b="1">
-                <a:solidFill>
-                  <a:srgbClr val="1F2A37"/>
-                </a:solidFill>
-              </a:rPr>
-              <a:t>Report back</a:t>
-            </a:r>
-          </a:p>
-        </p:txBody>
-      </p:sp>
-      <p:sp>
-        <p:nvSpPr>
-          <p:cNvPr id="3" name="TextBox 2"/>
+          <p:cNvPr id="2" name="TextBox 1"/>
           <p:cNvSpPr txBox="1"/>
           <p:nvPr/>
         </p:nvSpPr>
         <p:spPr>
           <a:xfrm>
-            <a:off x="822960" y="1828800"/>
-            <a:ext cx="10515600" cy="4206240"/>
+            <a:off x="502920" y="274320"/>
+            <a:ext cx="11155680" cy="731520"/>
           </a:xfrm>
           <a:prstGeom prst="rect">
             <a:avLst/>
@@ -3824,53 +5353,805 @@
           <a:noFill/>
         </p:spPr>
         <p:txBody>
-          <a:bodyPr wrap="square">
+          <a:bodyPr wrap="none">
             <a:spAutoFit/>
           </a:bodyPr>
           <a:lstStyle/>
           <a:p>
-            <a:pPr>
-              <a:spcAft>
-                <a:spcPts val="1400"/>
-              </a:spcAft>
-            </a:pPr>
-            <a:r>
-              <a:rPr sz="2800">
+            <a:r>
+              <a:rPr sz="2600" b="1">
                 <a:solidFill>
                   <a:srgbClr val="01AEFD"/>
                 </a:solidFill>
               </a:rPr>
-              <a:t>Evidence, not opinion</a:t>
-            </a:r>
-          </a:p>
-          <a:p>
-            <a:pPr>
-              <a:spcAft>
-                <a:spcPts val="1400"/>
-              </a:spcAft>
-            </a:pPr>
-            <a:r>
-              <a:rPr sz="2400">
-                <a:solidFill>
-                  <a:srgbClr val="1F2A37"/>
-                </a:solidFill>
-              </a:rPr>
-              <a:t>• "smart is better" - weak</a:t>
-            </a:r>
-          </a:p>
-          <a:p>
-            <a:pPr>
-              <a:spcAft>
-                <a:spcPts val="1400"/>
-              </a:spcAft>
-            </a:pPr>
-            <a:r>
-              <a:rPr sz="2400">
-                <a:solidFill>
-                  <a:srgbClr val="1F2A37"/>
-                </a:solidFill>
-              </a:rPr>
-              <a:t>• "smart kept the 40-word rule, fast ignored it" - strong</a:t>
+              <a:t>Type this into style.css  (2 of 7)</a:t>
+            </a:r>
+          </a:p>
+        </p:txBody>
+      </p:sp>
+      <p:sp>
+        <p:nvSpPr>
+          <p:cNvPr id="3" name="TextBox 2"/>
+          <p:cNvSpPr txBox="1"/>
+          <p:nvPr/>
+        </p:nvSpPr>
+        <p:spPr>
+          <a:xfrm>
+            <a:off x="502920" y="1051560"/>
+            <a:ext cx="11155680" cy="5394960"/>
+          </a:xfrm>
+          <a:prstGeom prst="rect">
+            <a:avLst/>
+          </a:prstGeom>
+          <a:noFill/>
+        </p:spPr>
+        <p:txBody>
+          <a:bodyPr wrap="none">
+            <a:spAutoFit/>
+          </a:bodyPr>
+          <a:lstStyle/>
+          <a:p>
+            <a:pPr>
+              <a:spcAft>
+                <a:spcPts val="0"/>
+              </a:spcAft>
+            </a:pPr>
+            <a:r>
+              <a:rPr sz="1700">
+                <a:solidFill>
+                  <a:srgbClr val="6D8C97"/>
+                </a:solidFill>
+                <a:latin typeface="Consolas"/>
+              </a:rPr>
+              <a:t>  75  </a:t>
+            </a:r>
+            <a:r>
+              <a:rPr sz="1700">
+                <a:solidFill>
+                  <a:srgbClr val="7FE0A0"/>
+                </a:solidFill>
+                <a:latin typeface="Consolas"/>
+              </a:rPr>
+              <a:t>.controls {</a:t>
+            </a:r>
+          </a:p>
+          <a:p>
+            <a:pPr>
+              <a:spcAft>
+                <a:spcPts val="0"/>
+              </a:spcAft>
+            </a:pPr>
+            <a:r>
+              <a:rPr sz="1700">
+                <a:solidFill>
+                  <a:srgbClr val="6D8C97"/>
+                </a:solidFill>
+                <a:latin typeface="Consolas"/>
+              </a:rPr>
+              <a:t>  76  </a:t>
+            </a:r>
+            <a:r>
+              <a:rPr sz="1700">
+                <a:solidFill>
+                  <a:srgbClr val="7FE0A0"/>
+                </a:solidFill>
+                <a:latin typeface="Consolas"/>
+              </a:rPr>
+              <a:t>  display: flex;</a:t>
+            </a:r>
+          </a:p>
+          <a:p>
+            <a:pPr>
+              <a:spcAft>
+                <a:spcPts val="0"/>
+              </a:spcAft>
+            </a:pPr>
+            <a:r>
+              <a:rPr sz="1700">
+                <a:solidFill>
+                  <a:srgbClr val="6D8C97"/>
+                </a:solidFill>
+                <a:latin typeface="Consolas"/>
+              </a:rPr>
+              <a:t>  77  </a:t>
+            </a:r>
+            <a:r>
+              <a:rPr sz="1700">
+                <a:solidFill>
+                  <a:srgbClr val="7FE0A0"/>
+                </a:solidFill>
+                <a:latin typeface="Consolas"/>
+              </a:rPr>
+              <a:t>  gap: 18px;</a:t>
+            </a:r>
+          </a:p>
+          <a:p>
+            <a:pPr>
+              <a:spcAft>
+                <a:spcPts val="0"/>
+              </a:spcAft>
+            </a:pPr>
+            <a:r>
+              <a:rPr sz="1700">
+                <a:solidFill>
+                  <a:srgbClr val="6D8C97"/>
+                </a:solidFill>
+                <a:latin typeface="Consolas"/>
+              </a:rPr>
+              <a:t>  78  </a:t>
+            </a:r>
+            <a:r>
+              <a:rPr sz="1700">
+                <a:solidFill>
+                  <a:srgbClr val="7FE0A0"/>
+                </a:solidFill>
+                <a:latin typeface="Consolas"/>
+              </a:rPr>
+              <a:t>  flex-wrap: wrap;</a:t>
+            </a:r>
+          </a:p>
+          <a:p>
+            <a:pPr>
+              <a:spcAft>
+                <a:spcPts val="0"/>
+              </a:spcAft>
+            </a:pPr>
+            <a:r>
+              <a:rPr sz="1700">
+                <a:solidFill>
+                  <a:srgbClr val="6D8C97"/>
+                </a:solidFill>
+                <a:latin typeface="Consolas"/>
+              </a:rPr>
+              <a:t>  79  </a:t>
+            </a:r>
+            <a:r>
+              <a:rPr sz="1700">
+                <a:solidFill>
+                  <a:srgbClr val="7FE0A0"/>
+                </a:solidFill>
+                <a:latin typeface="Consolas"/>
+              </a:rPr>
+              <a:t>  margin-bottom: 12px;</a:t>
+            </a:r>
+          </a:p>
+          <a:p>
+            <a:pPr>
+              <a:spcAft>
+                <a:spcPts val="0"/>
+              </a:spcAft>
+            </a:pPr>
+            <a:r>
+              <a:rPr sz="1700">
+                <a:solidFill>
+                  <a:srgbClr val="6D8C97"/>
+                </a:solidFill>
+                <a:latin typeface="Consolas"/>
+              </a:rPr>
+              <a:t>  80  </a:t>
+            </a:r>
+            <a:r>
+              <a:rPr sz="1700">
+                <a:solidFill>
+                  <a:srgbClr val="7FE0A0"/>
+                </a:solidFill>
+                <a:latin typeface="Consolas"/>
+              </a:rPr>
+              <a:t>  font-size: 14px;</a:t>
+            </a:r>
+          </a:p>
+          <a:p>
+            <a:pPr>
+              <a:spcAft>
+                <a:spcPts val="0"/>
+              </a:spcAft>
+            </a:pPr>
+            <a:r>
+              <a:rPr sz="1700">
+                <a:solidFill>
+                  <a:srgbClr val="6D8C97"/>
+                </a:solidFill>
+                <a:latin typeface="Consolas"/>
+              </a:rPr>
+              <a:t>  81  </a:t>
+            </a:r>
+            <a:r>
+              <a:rPr sz="1700">
+                <a:solidFill>
+                  <a:srgbClr val="7FE0A0"/>
+                </a:solidFill>
+                <a:latin typeface="Consolas"/>
+              </a:rPr>
+              <a:t>}</a:t>
+            </a:r>
+          </a:p>
+          <a:p>
+            <a:pPr>
+              <a:spcAft>
+                <a:spcPts val="0"/>
+              </a:spcAft>
+            </a:pPr>
+            <a:r>
+              <a:rPr sz="1700">
+                <a:solidFill>
+                  <a:srgbClr val="6D8C97"/>
+                </a:solidFill>
+                <a:latin typeface="Consolas"/>
+              </a:rPr>
+              <a:t>  82  </a:t>
+            </a:r>
+            <a:r>
+              <a:rPr sz="1700">
+                <a:solidFill>
+                  <a:srgbClr val="7FE0A0"/>
+                </a:solidFill>
+                <a:latin typeface="Consolas"/>
+              </a:rPr>
+              <a:t>.controls label { display: grid; gap: 4px; }</a:t>
+            </a:r>
+          </a:p>
+          <a:p>
+            <a:pPr>
+              <a:spcAft>
+                <a:spcPts val="0"/>
+              </a:spcAft>
+            </a:pPr>
+            <a:r>
+              <a:rPr sz="1700">
+                <a:solidFill>
+                  <a:srgbClr val="6D8C97"/>
+                </a:solidFill>
+                <a:latin typeface="Consolas"/>
+              </a:rPr>
+              <a:t>  83  </a:t>
+            </a:r>
+            <a:r>
+              <a:rPr sz="1700">
+                <a:solidFill>
+                  <a:srgbClr val="7FE0A0"/>
+                </a:solidFill>
+                <a:latin typeface="Consolas"/>
+              </a:rPr>
+              <a:t>.controls select, .controls input { font-size: 14px; }</a:t>
+            </a:r>
+          </a:p>
+        </p:txBody>
+      </p:sp>
+    </p:spTree>
+  </p:cSld>
+  <p:clrMapOvr>
+    <a:masterClrMapping/>
+  </p:clrMapOvr>
+</p:sld>
+</file>
+
+<file path=ppt/slides/slide8.xml><?xml version="1.0" encoding="utf-8"?>
+<p:sld xmlns:a="http://schemas.openxmlformats.org/drawingml/2006/main" xmlns:p="http://schemas.openxmlformats.org/presentationml/2006/main" xmlns:r="http://schemas.openxmlformats.org/officeDocument/2006/relationships">
+  <p:cSld>
+    <p:bg>
+      <p:bgPr>
+        <a:solidFill>
+          <a:srgbClr val="102127"/>
+        </a:solidFill>
+        <a:effectLst/>
+      </p:bgPr>
+    </p:bg>
+    <p:spTree>
+      <p:nvGrpSpPr>
+        <p:cNvPr id="1" name=""/>
+        <p:cNvGrpSpPr/>
+        <p:nvPr/>
+      </p:nvGrpSpPr>
+      <p:grpSpPr/>
+      <p:sp>
+        <p:nvSpPr>
+          <p:cNvPr id="2" name="TextBox 1"/>
+          <p:cNvSpPr txBox="1"/>
+          <p:nvPr/>
+        </p:nvSpPr>
+        <p:spPr>
+          <a:xfrm>
+            <a:off x="502920" y="274320"/>
+            <a:ext cx="11155680" cy="731520"/>
+          </a:xfrm>
+          <a:prstGeom prst="rect">
+            <a:avLst/>
+          </a:prstGeom>
+          <a:noFill/>
+        </p:spPr>
+        <p:txBody>
+          <a:bodyPr wrap="none">
+            <a:spAutoFit/>
+          </a:bodyPr>
+          <a:lstStyle/>
+          <a:p>
+            <a:r>
+              <a:rPr sz="2600" b="1">
+                <a:solidFill>
+                  <a:srgbClr val="01AEFD"/>
+                </a:solidFill>
+              </a:rPr>
+              <a:t>Type this into script.js  (3 of 7)</a:t>
+            </a:r>
+          </a:p>
+        </p:txBody>
+      </p:sp>
+      <p:sp>
+        <p:nvSpPr>
+          <p:cNvPr id="3" name="TextBox 2"/>
+          <p:cNvSpPr txBox="1"/>
+          <p:nvPr/>
+        </p:nvSpPr>
+        <p:spPr>
+          <a:xfrm>
+            <a:off x="502920" y="1051560"/>
+            <a:ext cx="11155680" cy="5394960"/>
+          </a:xfrm>
+          <a:prstGeom prst="rect">
+            <a:avLst/>
+          </a:prstGeom>
+          <a:noFill/>
+        </p:spPr>
+        <p:txBody>
+          <a:bodyPr wrap="none">
+            <a:spAutoFit/>
+          </a:bodyPr>
+          <a:lstStyle/>
+          <a:p>
+            <a:pPr>
+              <a:spcAft>
+                <a:spcPts val="0"/>
+              </a:spcAft>
+            </a:pPr>
+            <a:r>
+              <a:rPr sz="1700">
+                <a:solidFill>
+                  <a:srgbClr val="6D8C97"/>
+                </a:solidFill>
+                <a:latin typeface="Consolas"/>
+              </a:rPr>
+              <a:t>   8  </a:t>
+            </a:r>
+            <a:r>
+              <a:rPr sz="1700">
+                <a:solidFill>
+                  <a:srgbClr val="DCECEF"/>
+                </a:solidFill>
+                <a:latin typeface="Consolas"/>
+              </a:rPr>
+              <a:t> </a:t>
+            </a:r>
+          </a:p>
+          <a:p>
+            <a:pPr>
+              <a:spcAft>
+                <a:spcPts val="0"/>
+              </a:spcAft>
+            </a:pPr>
+            <a:r>
+              <a:rPr sz="1700">
+                <a:solidFill>
+                  <a:srgbClr val="6D8C97"/>
+                </a:solidFill>
+                <a:latin typeface="Consolas"/>
+              </a:rPr>
+              <a:t>   9  </a:t>
+            </a:r>
+            <a:r>
+              <a:rPr sz="1700">
+                <a:solidFill>
+                  <a:srgbClr val="DCECEF"/>
+                </a:solidFill>
+                <a:latin typeface="Consolas"/>
+              </a:rPr>
+              <a:t>// Week 2: find the boxes we named in index.html.</a:t>
+            </a:r>
+          </a:p>
+          <a:p>
+            <a:pPr>
+              <a:spcAft>
+                <a:spcPts val="0"/>
+              </a:spcAft>
+            </a:pPr>
+            <a:r>
+              <a:rPr sz="1700">
+                <a:solidFill>
+                  <a:srgbClr val="6D8C97"/>
+                </a:solidFill>
+                <a:latin typeface="Consolas"/>
+              </a:rPr>
+              <a:t>  10  </a:t>
+            </a:r>
+            <a:r>
+              <a:rPr sz="1700">
+                <a:solidFill>
+                  <a:srgbClr val="DCECEF"/>
+                </a:solidFill>
+                <a:latin typeface="Consolas"/>
+              </a:rPr>
+              <a:t>// document.getElementById looks for the id= we wrote on each element.</a:t>
+            </a:r>
+          </a:p>
+          <a:p>
+            <a:pPr>
+              <a:spcAft>
+                <a:spcPts val="0"/>
+              </a:spcAft>
+            </a:pPr>
+            <a:r>
+              <a:rPr sz="1700">
+                <a:solidFill>
+                  <a:srgbClr val="6D8C97"/>
+                </a:solidFill>
+                <a:latin typeface="Consolas"/>
+              </a:rPr>
+              <a:t>  11  </a:t>
+            </a:r>
+            <a:r>
+              <a:rPr sz="1700">
+                <a:solidFill>
+                  <a:srgbClr val="DCECEF"/>
+                </a:solidFill>
+                <a:latin typeface="Consolas"/>
+              </a:rPr>
+              <a:t>const chat = document.getElementById('chat');</a:t>
+            </a:r>
+          </a:p>
+          <a:p>
+            <a:pPr>
+              <a:spcAft>
+                <a:spcPts val="0"/>
+              </a:spcAft>
+            </a:pPr>
+            <a:r>
+              <a:rPr sz="1700">
+                <a:solidFill>
+                  <a:srgbClr val="6D8C97"/>
+                </a:solidFill>
+                <a:latin typeface="Consolas"/>
+              </a:rPr>
+              <a:t>  12  </a:t>
+            </a:r>
+            <a:r>
+              <a:rPr sz="1700">
+                <a:solidFill>
+                  <a:srgbClr val="DCECEF"/>
+                </a:solidFill>
+                <a:latin typeface="Consolas"/>
+              </a:rPr>
+              <a:t>const composer = document.getElementById('composer');</a:t>
+            </a:r>
+          </a:p>
+          <a:p>
+            <a:pPr>
+              <a:spcAft>
+                <a:spcPts val="0"/>
+              </a:spcAft>
+            </a:pPr>
+            <a:r>
+              <a:rPr sz="1700">
+                <a:solidFill>
+                  <a:srgbClr val="6D8C97"/>
+                </a:solidFill>
+                <a:latin typeface="Consolas"/>
+              </a:rPr>
+              <a:t>  13  </a:t>
+            </a:r>
+            <a:r>
+              <a:rPr sz="1700">
+                <a:solidFill>
+                  <a:srgbClr val="DCECEF"/>
+                </a:solidFill>
+                <a:latin typeface="Consolas"/>
+              </a:rPr>
+              <a:t>const promptBox = document.getElementById('prompt');</a:t>
+            </a:r>
+          </a:p>
+          <a:p>
+            <a:pPr>
+              <a:spcAft>
+                <a:spcPts val="0"/>
+              </a:spcAft>
+            </a:pPr>
+            <a:r>
+              <a:rPr sz="1700">
+                <a:solidFill>
+                  <a:srgbClr val="6D8C97"/>
+                </a:solidFill>
+                <a:latin typeface="Consolas"/>
+              </a:rPr>
+              <a:t>  14  </a:t>
+            </a:r>
+            <a:r>
+              <a:rPr sz="1700">
+                <a:solidFill>
+                  <a:srgbClr val="DCECEF"/>
+                </a:solidFill>
+                <a:latin typeface="Consolas"/>
+              </a:rPr>
+              <a:t>const personaBox = document.getElementById('persona');</a:t>
+            </a:r>
+          </a:p>
+          <a:p>
+            <a:pPr>
+              <a:spcAft>
+                <a:spcPts val="0"/>
+              </a:spcAft>
+            </a:pPr>
+            <a:r>
+              <a:rPr sz="1700">
+                <a:solidFill>
+                  <a:srgbClr val="6D8C97"/>
+                </a:solidFill>
+                <a:latin typeface="Consolas"/>
+              </a:rPr>
+              <a:t>  15  </a:t>
+            </a:r>
+            <a:r>
+              <a:rPr sz="1700">
+                <a:solidFill>
+                  <a:srgbClr val="7FE0A0"/>
+                </a:solidFill>
+                <a:latin typeface="Consolas"/>
+              </a:rPr>
+              <a:t>const modelBox = document.getElementById('model');</a:t>
+            </a:r>
+          </a:p>
+          <a:p>
+            <a:pPr>
+              <a:spcAft>
+                <a:spcPts val="0"/>
+              </a:spcAft>
+            </a:pPr>
+            <a:r>
+              <a:rPr sz="1700">
+                <a:solidFill>
+                  <a:srgbClr val="6D8C97"/>
+                </a:solidFill>
+                <a:latin typeface="Consolas"/>
+              </a:rPr>
+              <a:t>  16  </a:t>
+            </a:r>
+            <a:r>
+              <a:rPr sz="1700">
+                <a:solidFill>
+                  <a:srgbClr val="7FE0A0"/>
+                </a:solidFill>
+                <a:latin typeface="Consolas"/>
+              </a:rPr>
+              <a:t>const tempBox = document.getElementById('temp');</a:t>
+            </a:r>
+          </a:p>
+          <a:p>
+            <a:pPr>
+              <a:spcAft>
+                <a:spcPts val="0"/>
+              </a:spcAft>
+            </a:pPr>
+            <a:r>
+              <a:rPr sz="1700">
+                <a:solidFill>
+                  <a:srgbClr val="6D8C97"/>
+                </a:solidFill>
+                <a:latin typeface="Consolas"/>
+              </a:rPr>
+              <a:t>  17  </a:t>
+            </a:r>
+            <a:r>
+              <a:rPr sz="1700">
+                <a:solidFill>
+                  <a:srgbClr val="7FE0A0"/>
+                </a:solidFill>
+                <a:latin typeface="Consolas"/>
+              </a:rPr>
+              <a:t>const tempOut = document.getElementById('tempOut');</a:t>
+            </a:r>
+          </a:p>
+        </p:txBody>
+      </p:sp>
+    </p:spTree>
+  </p:cSld>
+  <p:clrMapOvr>
+    <a:masterClrMapping/>
+  </p:clrMapOvr>
+</p:sld>
+</file>
+
+<file path=ppt/slides/slide9.xml><?xml version="1.0" encoding="utf-8"?>
+<p:sld xmlns:a="http://schemas.openxmlformats.org/drawingml/2006/main" xmlns:p="http://schemas.openxmlformats.org/presentationml/2006/main" xmlns:r="http://schemas.openxmlformats.org/officeDocument/2006/relationships">
+  <p:cSld>
+    <p:bg>
+      <p:bgPr>
+        <a:solidFill>
+          <a:srgbClr val="102127"/>
+        </a:solidFill>
+        <a:effectLst/>
+      </p:bgPr>
+    </p:bg>
+    <p:spTree>
+      <p:nvGrpSpPr>
+        <p:cNvPr id="1" name=""/>
+        <p:cNvGrpSpPr/>
+        <p:nvPr/>
+      </p:nvGrpSpPr>
+      <p:grpSpPr/>
+      <p:sp>
+        <p:nvSpPr>
+          <p:cNvPr id="2" name="TextBox 1"/>
+          <p:cNvSpPr txBox="1"/>
+          <p:nvPr/>
+        </p:nvSpPr>
+        <p:spPr>
+          <a:xfrm>
+            <a:off x="502920" y="274320"/>
+            <a:ext cx="11155680" cy="731520"/>
+          </a:xfrm>
+          <a:prstGeom prst="rect">
+            <a:avLst/>
+          </a:prstGeom>
+          <a:noFill/>
+        </p:spPr>
+        <p:txBody>
+          <a:bodyPr wrap="none">
+            <a:spAutoFit/>
+          </a:bodyPr>
+          <a:lstStyle/>
+          <a:p>
+            <a:r>
+              <a:rPr sz="2600" b="1">
+                <a:solidFill>
+                  <a:srgbClr val="01AEFD"/>
+                </a:solidFill>
+              </a:rPr>
+              <a:t>Type this into script.js  (4 of 7)</a:t>
+            </a:r>
+          </a:p>
+        </p:txBody>
+      </p:sp>
+      <p:sp>
+        <p:nvSpPr>
+          <p:cNvPr id="3" name="TextBox 2"/>
+          <p:cNvSpPr txBox="1"/>
+          <p:nvPr/>
+        </p:nvSpPr>
+        <p:spPr>
+          <a:xfrm>
+            <a:off x="502920" y="1051560"/>
+            <a:ext cx="11155680" cy="5394960"/>
+          </a:xfrm>
+          <a:prstGeom prst="rect">
+            <a:avLst/>
+          </a:prstGeom>
+          <a:noFill/>
+        </p:spPr>
+        <p:txBody>
+          <a:bodyPr wrap="none">
+            <a:spAutoFit/>
+          </a:bodyPr>
+          <a:lstStyle/>
+          <a:p>
+            <a:pPr>
+              <a:spcAft>
+                <a:spcPts val="0"/>
+              </a:spcAft>
+            </a:pPr>
+            <a:r>
+              <a:rPr sz="1700">
+                <a:solidFill>
+                  <a:srgbClr val="6D8C97"/>
+                </a:solidFill>
+                <a:latin typeface="Consolas"/>
+              </a:rPr>
+              <a:t> 101  </a:t>
+            </a:r>
+            <a:r>
+              <a:rPr sz="1700">
+                <a:solidFill>
+                  <a:srgbClr val="DCECEF"/>
+                </a:solidFill>
+                <a:latin typeface="Consolas"/>
+              </a:rPr>
+              <a:t> </a:t>
+            </a:r>
+          </a:p>
+          <a:p>
+            <a:pPr>
+              <a:spcAft>
+                <a:spcPts val="0"/>
+              </a:spcAft>
+            </a:pPr>
+            <a:r>
+              <a:rPr sz="1700">
+                <a:solidFill>
+                  <a:srgbClr val="6D8C97"/>
+                </a:solidFill>
+                <a:latin typeface="Consolas"/>
+              </a:rPr>
+              <a:t> 102  </a:t>
+            </a:r>
+            <a:r>
+              <a:rPr sz="1700">
+                <a:solidFill>
+                  <a:srgbClr val="7FE0A0"/>
+                </a:solidFill>
+                <a:latin typeface="Consolas"/>
+              </a:rPr>
+              <a:t>// Week 9: show the slider's value so the number means something.</a:t>
+            </a:r>
+          </a:p>
+          <a:p>
+            <a:pPr>
+              <a:spcAft>
+                <a:spcPts val="0"/>
+              </a:spcAft>
+            </a:pPr>
+            <a:r>
+              <a:rPr sz="1700">
+                <a:solidFill>
+                  <a:srgbClr val="6D8C97"/>
+                </a:solidFill>
+                <a:latin typeface="Consolas"/>
+              </a:rPr>
+              <a:t> 103  </a:t>
+            </a:r>
+            <a:r>
+              <a:rPr sz="1700">
+                <a:solidFill>
+                  <a:srgbClr val="7FE0A0"/>
+                </a:solidFill>
+                <a:latin typeface="Consolas"/>
+              </a:rPr>
+              <a:t>tempBox.addEventListener('input', function () {</a:t>
+            </a:r>
+          </a:p>
+          <a:p>
+            <a:pPr>
+              <a:spcAft>
+                <a:spcPts val="0"/>
+              </a:spcAft>
+            </a:pPr>
+            <a:r>
+              <a:rPr sz="1700">
+                <a:solidFill>
+                  <a:srgbClr val="6D8C97"/>
+                </a:solidFill>
+                <a:latin typeface="Consolas"/>
+              </a:rPr>
+              <a:t> 104  </a:t>
+            </a:r>
+            <a:r>
+              <a:rPr sz="1700">
+                <a:solidFill>
+                  <a:srgbClr val="7FE0A0"/>
+                </a:solidFill>
+                <a:latin typeface="Consolas"/>
+              </a:rPr>
+              <a:t>  tempOut.textContent = tempBox.value;</a:t>
+            </a:r>
+          </a:p>
+          <a:p>
+            <a:pPr>
+              <a:spcAft>
+                <a:spcPts val="0"/>
+              </a:spcAft>
+            </a:pPr>
+            <a:r>
+              <a:rPr sz="1700">
+                <a:solidFill>
+                  <a:srgbClr val="6D8C97"/>
+                </a:solidFill>
+                <a:latin typeface="Consolas"/>
+              </a:rPr>
+              <a:t> 105  </a:t>
+            </a:r>
+            <a:r>
+              <a:rPr sz="1700">
+                <a:solidFill>
+                  <a:srgbClr val="7FE0A0"/>
+                </a:solidFill>
+                <a:latin typeface="Consolas"/>
+              </a:rPr>
+              <a:t>});</a:t>
             </a:r>
           </a:p>
         </p:txBody>

--- a/ai101/slides/week-09.pptx
+++ b/ai101/slides/week-09.pptx
@@ -3258,7 +3258,7 @@
                 </a:solidFill>
                 <a:latin typeface="Consolas"/>
               </a:rPr>
-              <a:t>  68  </a:t>
+              <a:t>  71  </a:t>
             </a:r>
             <a:r>
               <a:rPr sz="1400">
@@ -3283,7 +3283,7 @@
                 </a:solidFill>
                 <a:latin typeface="Consolas"/>
               </a:rPr>
-              <a:t>  69  </a:t>
+              <a:t>  72  </a:t>
             </a:r>
             <a:r>
               <a:rPr sz="1400">
@@ -3308,7 +3308,7 @@
                 </a:solidFill>
                 <a:latin typeface="Consolas"/>
               </a:rPr>
-              <a:t>  70  </a:t>
+              <a:t>  73  </a:t>
             </a:r>
             <a:r>
               <a:rPr sz="1400">
@@ -3333,7 +3333,7 @@
                 </a:solidFill>
                 <a:latin typeface="Consolas"/>
               </a:rPr>
-              <a:t>  71  </a:t>
+              <a:t>  74  </a:t>
             </a:r>
             <a:r>
               <a:rPr sz="1400">
@@ -3358,7 +3358,7 @@
                 </a:solidFill>
                 <a:latin typeface="Consolas"/>
               </a:rPr>
-              <a:t>  72  </a:t>
+              <a:t>  75  </a:t>
             </a:r>
             <a:r>
               <a:rPr sz="1400">
@@ -3383,7 +3383,7 @@
                 </a:solidFill>
                 <a:latin typeface="Consolas"/>
               </a:rPr>
-              <a:t>  73  </a:t>
+              <a:t>  76  </a:t>
             </a:r>
             <a:r>
               <a:rPr sz="1400">
@@ -3408,7 +3408,7 @@
                 </a:solidFill>
                 <a:latin typeface="Consolas"/>
               </a:rPr>
-              <a:t>  74  </a:t>
+              <a:t>  77  </a:t>
             </a:r>
             <a:r>
               <a:rPr sz="1400">
@@ -3433,7 +3433,7 @@
                 </a:solidFill>
                 <a:latin typeface="Consolas"/>
               </a:rPr>
-              <a:t>  75  </a:t>
+              <a:t>  78  </a:t>
             </a:r>
             <a:r>
               <a:rPr sz="1400">
@@ -3458,7 +3458,7 @@
                 </a:solidFill>
                 <a:latin typeface="Consolas"/>
               </a:rPr>
-              <a:t>  76  </a:t>
+              <a:t>  79  </a:t>
             </a:r>
             <a:r>
               <a:rPr sz="1400">
@@ -3483,7 +3483,7 @@
                 </a:solidFill>
                 <a:latin typeface="Consolas"/>
               </a:rPr>
-              <a:t>  77  </a:t>
+              <a:t>  80  </a:t>
             </a:r>
             <a:r>
               <a:rPr sz="1400">
@@ -3508,7 +3508,7 @@
                 </a:solidFill>
                 <a:latin typeface="Consolas"/>
               </a:rPr>
-              <a:t>  78  </a:t>
+              <a:t>  81  </a:t>
             </a:r>
             <a:r>
               <a:rPr sz="1400">
@@ -3533,7 +3533,7 @@
                 </a:solidFill>
                 <a:latin typeface="Consolas"/>
               </a:rPr>
-              <a:t>  79  </a:t>
+              <a:t>  82  </a:t>
             </a:r>
             <a:r>
               <a:rPr sz="1400">
@@ -3558,7 +3558,7 @@
                 </a:solidFill>
                 <a:latin typeface="Consolas"/>
               </a:rPr>
-              <a:t>  80  </a:t>
+              <a:t>  83  </a:t>
             </a:r>
             <a:r>
               <a:rPr sz="1400">
@@ -3583,7 +3583,7 @@
                 </a:solidFill>
                 <a:latin typeface="Consolas"/>
               </a:rPr>
-              <a:t>  81  </a:t>
+              <a:t>  84  </a:t>
             </a:r>
             <a:r>
               <a:rPr sz="1400">
@@ -3608,7 +3608,7 @@
                 </a:solidFill>
                 <a:latin typeface="Consolas"/>
               </a:rPr>
-              <a:t>  82  </a:t>
+              <a:t>  85  </a:t>
             </a:r>
             <a:r>
               <a:rPr sz="1400">
@@ -3715,7 +3715,7 @@
                 </a:solidFill>
                 <a:latin typeface="Consolas"/>
               </a:rPr>
-              <a:t>  83  </a:t>
+              <a:t>  86  </a:t>
             </a:r>
             <a:r>
               <a:rPr sz="1400">
@@ -3740,7 +3740,7 @@
                 </a:solidFill>
                 <a:latin typeface="Consolas"/>
               </a:rPr>
-              <a:t>  84  </a:t>
+              <a:t>  87  </a:t>
             </a:r>
             <a:r>
               <a:rPr sz="1400">
@@ -3765,7 +3765,7 @@
                 </a:solidFill>
                 <a:latin typeface="Consolas"/>
               </a:rPr>
-              <a:t>  85  </a:t>
+              <a:t>  88  </a:t>
             </a:r>
             <a:r>
               <a:rPr sz="1400">
@@ -3790,7 +3790,7 @@
                 </a:solidFill>
                 <a:latin typeface="Consolas"/>
               </a:rPr>
-              <a:t>  86  </a:t>
+              <a:t>  89  </a:t>
             </a:r>
             <a:r>
               <a:rPr sz="1400">
@@ -3815,7 +3815,7 @@
                 </a:solidFill>
                 <a:latin typeface="Consolas"/>
               </a:rPr>
-              <a:t>  87  </a:t>
+              <a:t>  90  </a:t>
             </a:r>
             <a:r>
               <a:rPr sz="1400">
@@ -3840,7 +3840,7 @@
                 </a:solidFill>
                 <a:latin typeface="Consolas"/>
               </a:rPr>
-              <a:t>  88  </a:t>
+              <a:t>  91  </a:t>
             </a:r>
             <a:r>
               <a:rPr sz="1400">
@@ -3865,7 +3865,7 @@
                 </a:solidFill>
                 <a:latin typeface="Consolas"/>
               </a:rPr>
-              <a:t>  89  </a:t>
+              <a:t>  92  </a:t>
             </a:r>
             <a:r>
               <a:rPr sz="1400">
@@ -3890,7 +3890,7 @@
                 </a:solidFill>
                 <a:latin typeface="Consolas"/>
               </a:rPr>
-              <a:t>  90  </a:t>
+              <a:t>  93  </a:t>
             </a:r>
             <a:r>
               <a:rPr sz="1400">
@@ -3915,7 +3915,7 @@
                 </a:solidFill>
                 <a:latin typeface="Consolas"/>
               </a:rPr>
-              <a:t>  91  </a:t>
+              <a:t>  94  </a:t>
             </a:r>
             <a:r>
               <a:rPr sz="1400">
@@ -3940,7 +3940,7 @@
                 </a:solidFill>
                 <a:latin typeface="Consolas"/>
               </a:rPr>
-              <a:t>  92  </a:t>
+              <a:t>  95  </a:t>
             </a:r>
             <a:r>
               <a:rPr sz="1400">
@@ -3965,7 +3965,7 @@
                 </a:solidFill>
                 <a:latin typeface="Consolas"/>
               </a:rPr>
-              <a:t>  93  </a:t>
+              <a:t>  96  </a:t>
             </a:r>
             <a:r>
               <a:rPr sz="1400">
@@ -3990,7 +3990,7 @@
                 </a:solidFill>
                 <a:latin typeface="Consolas"/>
               </a:rPr>
-              <a:t>  94  </a:t>
+              <a:t>  97  </a:t>
             </a:r>
             <a:r>
               <a:rPr sz="1400">
@@ -4015,7 +4015,7 @@
                 </a:solidFill>
                 <a:latin typeface="Consolas"/>
               </a:rPr>
-              <a:t>  95  </a:t>
+              <a:t>  98  </a:t>
             </a:r>
             <a:r>
               <a:rPr sz="1400">
@@ -4040,7 +4040,7 @@
                 </a:solidFill>
                 <a:latin typeface="Consolas"/>
               </a:rPr>
-              <a:t>  96  </a:t>
+              <a:t>  99  </a:t>
             </a:r>
             <a:r>
               <a:rPr sz="1400">
@@ -4065,7 +4065,7 @@
                 </a:solidFill>
                 <a:latin typeface="Consolas"/>
               </a:rPr>
-              <a:t>  97  </a:t>
+              <a:t> 100  </a:t>
             </a:r>
             <a:r>
               <a:rPr sz="1400">
@@ -4172,7 +4172,7 @@
                 </a:solidFill>
                 <a:latin typeface="Consolas"/>
               </a:rPr>
-              <a:t>  98  </a:t>
+              <a:t> 101  </a:t>
             </a:r>
             <a:r>
               <a:rPr sz="1700">
@@ -4197,7 +4197,7 @@
                 </a:solidFill>
                 <a:latin typeface="Consolas"/>
               </a:rPr>
-              <a:t>  99  </a:t>
+              <a:t> 102  </a:t>
             </a:r>
             <a:r>
               <a:rPr sz="1700">
@@ -4222,7 +4222,7 @@
                 </a:solidFill>
                 <a:latin typeface="Consolas"/>
               </a:rPr>
-              <a:t> 100  </a:t>
+              <a:t> 103  </a:t>
             </a:r>
             <a:r>
               <a:rPr sz="1700">
@@ -5040,16 +5040,16 @@
               </a:spcAft>
             </a:pPr>
             <a:r>
-              <a:rPr sz="1700">
-                <a:solidFill>
-                  <a:srgbClr val="6D8C97"/>
-                </a:solidFill>
-                <a:latin typeface="Consolas"/>
-              </a:rPr>
-              <a:t>  10  </a:t>
-            </a:r>
-            <a:r>
-              <a:rPr sz="1700">
+              <a:rPr sz="1400">
+                <a:solidFill>
+                  <a:srgbClr val="6D8C97"/>
+                </a:solidFill>
+                <a:latin typeface="Consolas"/>
+              </a:rPr>
+              <a:t>  12  </a:t>
+            </a:r>
+            <a:r>
+              <a:rPr sz="1400">
                 <a:solidFill>
                   <a:srgbClr val="7FE0A0"/>
                 </a:solidFill>
@@ -5065,21 +5065,46 @@
               </a:spcAft>
             </a:pPr>
             <a:r>
-              <a:rPr sz="1700">
-                <a:solidFill>
-                  <a:srgbClr val="6D8C97"/>
-                </a:solidFill>
-                <a:latin typeface="Consolas"/>
-              </a:rPr>
-              <a:t>  11  </a:t>
-            </a:r>
-            <a:r>
-              <a:rPr sz="1700">
+              <a:rPr sz="1400">
+                <a:solidFill>
+                  <a:srgbClr val="6D8C97"/>
+                </a:solidFill>
+                <a:latin typeface="Consolas"/>
+              </a:rPr>
+              <a:t>  13  </a:t>
+            </a:r>
+            <a:r>
+              <a:rPr sz="1400">
                 <a:solidFill>
                   <a:srgbClr val="7FE0A0"/>
                 </a:solidFill>
                 <a:latin typeface="Consolas"/>
               </a:rPr>
+              <a:t>    &lt;!-- The two value="" names are the only model names in the project. --&gt;</a:t>
+            </a:r>
+          </a:p>
+          <a:p>
+            <a:pPr>
+              <a:spcAft>
+                <a:spcPts val="0"/>
+              </a:spcAft>
+            </a:pPr>
+            <a:r>
+              <a:rPr sz="1400">
+                <a:solidFill>
+                  <a:srgbClr val="6D8C97"/>
+                </a:solidFill>
+                <a:latin typeface="Consolas"/>
+              </a:rPr>
+              <a:t>  14  </a:t>
+            </a:r>
+            <a:r>
+              <a:rPr sz="1400">
+                <a:solidFill>
+                  <a:srgbClr val="7FE0A0"/>
+                </a:solidFill>
+                <a:latin typeface="Consolas"/>
+              </a:rPr>
               <a:t>    &lt;label&gt;Brain</a:t>
             </a:r>
           </a:p>
@@ -5090,16 +5115,16 @@
               </a:spcAft>
             </a:pPr>
             <a:r>
-              <a:rPr sz="1700">
-                <a:solidFill>
-                  <a:srgbClr val="6D8C97"/>
-                </a:solidFill>
-                <a:latin typeface="Consolas"/>
-              </a:rPr>
-              <a:t>  12  </a:t>
-            </a:r>
-            <a:r>
-              <a:rPr sz="1700">
+              <a:rPr sz="1400">
+                <a:solidFill>
+                  <a:srgbClr val="6D8C97"/>
+                </a:solidFill>
+                <a:latin typeface="Consolas"/>
+              </a:rPr>
+              <a:t>  15  </a:t>
+            </a:r>
+            <a:r>
+              <a:rPr sz="1400">
                 <a:solidFill>
                   <a:srgbClr val="7FE0A0"/>
                 </a:solidFill>
@@ -5115,16 +5140,16 @@
               </a:spcAft>
             </a:pPr>
             <a:r>
-              <a:rPr sz="1700">
-                <a:solidFill>
-                  <a:srgbClr val="6D8C97"/>
-                </a:solidFill>
-                <a:latin typeface="Consolas"/>
-              </a:rPr>
-              <a:t>  13  </a:t>
-            </a:r>
-            <a:r>
-              <a:rPr sz="1700">
+              <a:rPr sz="1400">
+                <a:solidFill>
+                  <a:srgbClr val="6D8C97"/>
+                </a:solidFill>
+                <a:latin typeface="Consolas"/>
+              </a:rPr>
+              <a:t>  16  </a:t>
+            </a:r>
+            <a:r>
+              <a:rPr sz="1400">
                 <a:solidFill>
                   <a:srgbClr val="7FE0A0"/>
                 </a:solidFill>
@@ -5140,16 +5165,16 @@
               </a:spcAft>
             </a:pPr>
             <a:r>
-              <a:rPr sz="1700">
-                <a:solidFill>
-                  <a:srgbClr val="6D8C97"/>
-                </a:solidFill>
-                <a:latin typeface="Consolas"/>
-              </a:rPr>
-              <a:t>  14  </a:t>
-            </a:r>
-            <a:r>
-              <a:rPr sz="1700">
+              <a:rPr sz="1400">
+                <a:solidFill>
+                  <a:srgbClr val="6D8C97"/>
+                </a:solidFill>
+                <a:latin typeface="Consolas"/>
+              </a:rPr>
+              <a:t>  17  </a:t>
+            </a:r>
+            <a:r>
+              <a:rPr sz="1400">
                 <a:solidFill>
                   <a:srgbClr val="7FE0A0"/>
                 </a:solidFill>
@@ -5165,16 +5190,16 @@
               </a:spcAft>
             </a:pPr>
             <a:r>
-              <a:rPr sz="1700">
-                <a:solidFill>
-                  <a:srgbClr val="6D8C97"/>
-                </a:solidFill>
-                <a:latin typeface="Consolas"/>
-              </a:rPr>
-              <a:t>  15  </a:t>
-            </a:r>
-            <a:r>
-              <a:rPr sz="1700">
+              <a:rPr sz="1400">
+                <a:solidFill>
+                  <a:srgbClr val="6D8C97"/>
+                </a:solidFill>
+                <a:latin typeface="Consolas"/>
+              </a:rPr>
+              <a:t>  18  </a:t>
+            </a:r>
+            <a:r>
+              <a:rPr sz="1400">
                 <a:solidFill>
                   <a:srgbClr val="7FE0A0"/>
                 </a:solidFill>
@@ -5190,16 +5215,16 @@
               </a:spcAft>
             </a:pPr>
             <a:r>
-              <a:rPr sz="1700">
-                <a:solidFill>
-                  <a:srgbClr val="6D8C97"/>
-                </a:solidFill>
-                <a:latin typeface="Consolas"/>
-              </a:rPr>
-              <a:t>  16  </a:t>
-            </a:r>
-            <a:r>
-              <a:rPr sz="1700">
+              <a:rPr sz="1400">
+                <a:solidFill>
+                  <a:srgbClr val="6D8C97"/>
+                </a:solidFill>
+                <a:latin typeface="Consolas"/>
+              </a:rPr>
+              <a:t>  19  </a:t>
+            </a:r>
+            <a:r>
+              <a:rPr sz="1400">
                 <a:solidFill>
                   <a:srgbClr val="7FE0A0"/>
                 </a:solidFill>
@@ -5215,16 +5240,16 @@
               </a:spcAft>
             </a:pPr>
             <a:r>
-              <a:rPr sz="1700">
-                <a:solidFill>
-                  <a:srgbClr val="6D8C97"/>
-                </a:solidFill>
-                <a:latin typeface="Consolas"/>
-              </a:rPr>
-              <a:t>  17  </a:t>
-            </a:r>
-            <a:r>
-              <a:rPr sz="1700">
+              <a:rPr sz="1400">
+                <a:solidFill>
+                  <a:srgbClr val="6D8C97"/>
+                </a:solidFill>
+                <a:latin typeface="Consolas"/>
+              </a:rPr>
+              <a:t>  20  </a:t>
+            </a:r>
+            <a:r>
+              <a:rPr sz="1400">
                 <a:solidFill>
                   <a:srgbClr val="7FE0A0"/>
                 </a:solidFill>
@@ -5240,16 +5265,16 @@
               </a:spcAft>
             </a:pPr>
             <a:r>
-              <a:rPr sz="1700">
-                <a:solidFill>
-                  <a:srgbClr val="6D8C97"/>
-                </a:solidFill>
-                <a:latin typeface="Consolas"/>
-              </a:rPr>
-              <a:t>  18  </a:t>
-            </a:r>
-            <a:r>
-              <a:rPr sz="1700">
+              <a:rPr sz="1400">
+                <a:solidFill>
+                  <a:srgbClr val="6D8C97"/>
+                </a:solidFill>
+                <a:latin typeface="Consolas"/>
+              </a:rPr>
+              <a:t>  21  </a:t>
+            </a:r>
+            <a:r>
+              <a:rPr sz="1400">
                 <a:solidFill>
                   <a:srgbClr val="7FE0A0"/>
                 </a:solidFill>
@@ -5265,16 +5290,16 @@
               </a:spcAft>
             </a:pPr>
             <a:r>
-              <a:rPr sz="1700">
-                <a:solidFill>
-                  <a:srgbClr val="6D8C97"/>
-                </a:solidFill>
-                <a:latin typeface="Consolas"/>
-              </a:rPr>
-              <a:t>  19  </a:t>
-            </a:r>
-            <a:r>
-              <a:rPr sz="1700">
+              <a:rPr sz="1400">
+                <a:solidFill>
+                  <a:srgbClr val="6D8C97"/>
+                </a:solidFill>
+                <a:latin typeface="Consolas"/>
+              </a:rPr>
+              <a:t>  22  </a:t>
+            </a:r>
+            <a:r>
+              <a:rPr sz="1400">
                 <a:solidFill>
                   <a:srgbClr val="7FE0A0"/>
                 </a:solidFill>
@@ -5290,16 +5315,16 @@
               </a:spcAft>
             </a:pPr>
             <a:r>
-              <a:rPr sz="1700">
-                <a:solidFill>
-                  <a:srgbClr val="6D8C97"/>
-                </a:solidFill>
-                <a:latin typeface="Consolas"/>
-              </a:rPr>
-              <a:t>  20  </a:t>
-            </a:r>
-            <a:r>
-              <a:rPr sz="1700">
+              <a:rPr sz="1400">
+                <a:solidFill>
+                  <a:srgbClr val="6D8C97"/>
+                </a:solidFill>
+                <a:latin typeface="Consolas"/>
+              </a:rPr>
+              <a:t>  23  </a:t>
+            </a:r>
+            <a:r>
+              <a:rPr sz="1400">
                 <a:solidFill>
                   <a:srgbClr val="7FE0A0"/>
                 </a:solidFill>
@@ -5710,7 +5735,7 @@
                 </a:solidFill>
                 <a:latin typeface="Consolas"/>
               </a:rPr>
-              <a:t>   8  </a:t>
+              <a:t>  11  </a:t>
             </a:r>
             <a:r>
               <a:rPr sz="1700">
@@ -5735,7 +5760,7 @@
                 </a:solidFill>
                 <a:latin typeface="Consolas"/>
               </a:rPr>
-              <a:t>   9  </a:t>
+              <a:t>  12  </a:t>
             </a:r>
             <a:r>
               <a:rPr sz="1700">
@@ -5760,7 +5785,7 @@
                 </a:solidFill>
                 <a:latin typeface="Consolas"/>
               </a:rPr>
-              <a:t>  10  </a:t>
+              <a:t>  13  </a:t>
             </a:r>
             <a:r>
               <a:rPr sz="1700">
@@ -5785,7 +5810,7 @@
                 </a:solidFill>
                 <a:latin typeface="Consolas"/>
               </a:rPr>
-              <a:t>  11  </a:t>
+              <a:t>  14  </a:t>
             </a:r>
             <a:r>
               <a:rPr sz="1700">
@@ -5810,7 +5835,7 @@
                 </a:solidFill>
                 <a:latin typeface="Consolas"/>
               </a:rPr>
-              <a:t>  12  </a:t>
+              <a:t>  15  </a:t>
             </a:r>
             <a:r>
               <a:rPr sz="1700">
@@ -5835,7 +5860,7 @@
                 </a:solidFill>
                 <a:latin typeface="Consolas"/>
               </a:rPr>
-              <a:t>  13  </a:t>
+              <a:t>  16  </a:t>
             </a:r>
             <a:r>
               <a:rPr sz="1700">
@@ -5860,7 +5885,7 @@
                 </a:solidFill>
                 <a:latin typeface="Consolas"/>
               </a:rPr>
-              <a:t>  14  </a:t>
+              <a:t>  17  </a:t>
             </a:r>
             <a:r>
               <a:rPr sz="1700">
@@ -5885,7 +5910,7 @@
                 </a:solidFill>
                 <a:latin typeface="Consolas"/>
               </a:rPr>
-              <a:t>  15  </a:t>
+              <a:t>  18  </a:t>
             </a:r>
             <a:r>
               <a:rPr sz="1700">
@@ -5910,7 +5935,7 @@
                 </a:solidFill>
                 <a:latin typeface="Consolas"/>
               </a:rPr>
-              <a:t>  16  </a:t>
+              <a:t>  19  </a:t>
             </a:r>
             <a:r>
               <a:rPr sz="1700">
@@ -5935,7 +5960,7 @@
                 </a:solidFill>
                 <a:latin typeface="Consolas"/>
               </a:rPr>
-              <a:t>  17  </a:t>
+              <a:t>  20  </a:t>
             </a:r>
             <a:r>
               <a:rPr sz="1700">
@@ -6042,7 +6067,7 @@
                 </a:solidFill>
                 <a:latin typeface="Consolas"/>
               </a:rPr>
-              <a:t> 101  </a:t>
+              <a:t> 104  </a:t>
             </a:r>
             <a:r>
               <a:rPr sz="1700">
@@ -6067,7 +6092,7 @@
                 </a:solidFill>
                 <a:latin typeface="Consolas"/>
               </a:rPr>
-              <a:t> 102  </a:t>
+              <a:t> 105  </a:t>
             </a:r>
             <a:r>
               <a:rPr sz="1700">
@@ -6092,7 +6117,7 @@
                 </a:solidFill>
                 <a:latin typeface="Consolas"/>
               </a:rPr>
-              <a:t> 103  </a:t>
+              <a:t> 106  </a:t>
             </a:r>
             <a:r>
               <a:rPr sz="1700">
@@ -6117,7 +6142,7 @@
                 </a:solidFill>
                 <a:latin typeface="Consolas"/>
               </a:rPr>
-              <a:t> 104  </a:t>
+              <a:t> 107  </a:t>
             </a:r>
             <a:r>
               <a:rPr sz="1700">
@@ -6142,7 +6167,7 @@
                 </a:solidFill>
                 <a:latin typeface="Consolas"/>
               </a:rPr>
-              <a:t> 105  </a:t>
+              <a:t> 108  </a:t>
             </a:r>
             <a:r>
               <a:rPr sz="1700">

--- a/ai101/slides/week-09.pptx
+++ b/ai101/slides/week-09.pptx
@@ -3258,7 +3258,7 @@
                 </a:solidFill>
                 <a:latin typeface="Consolas"/>
               </a:rPr>
-              <a:t>  71  </a:t>
+              <a:t>  79  </a:t>
             </a:r>
             <a:r>
               <a:rPr sz="1400">
@@ -3283,7 +3283,7 @@
                 </a:solidFill>
                 <a:latin typeface="Consolas"/>
               </a:rPr>
-              <a:t>  72  </a:t>
+              <a:t>  80  </a:t>
             </a:r>
             <a:r>
               <a:rPr sz="1400">
@@ -3308,7 +3308,7 @@
                 </a:solidFill>
                 <a:latin typeface="Consolas"/>
               </a:rPr>
-              <a:t>  73  </a:t>
+              <a:t>  81  </a:t>
             </a:r>
             <a:r>
               <a:rPr sz="1400">
@@ -3333,7 +3333,7 @@
                 </a:solidFill>
                 <a:latin typeface="Consolas"/>
               </a:rPr>
-              <a:t>  74  </a:t>
+              <a:t>  82  </a:t>
             </a:r>
             <a:r>
               <a:rPr sz="1400">
@@ -3358,7 +3358,7 @@
                 </a:solidFill>
                 <a:latin typeface="Consolas"/>
               </a:rPr>
-              <a:t>  75  </a:t>
+              <a:t>  83  </a:t>
             </a:r>
             <a:r>
               <a:rPr sz="1400">
@@ -3383,7 +3383,7 @@
                 </a:solidFill>
                 <a:latin typeface="Consolas"/>
               </a:rPr>
-              <a:t>  76  </a:t>
+              <a:t>  84  </a:t>
             </a:r>
             <a:r>
               <a:rPr sz="1400">
@@ -3408,7 +3408,7 @@
                 </a:solidFill>
                 <a:latin typeface="Consolas"/>
               </a:rPr>
-              <a:t>  77  </a:t>
+              <a:t>  85  </a:t>
             </a:r>
             <a:r>
               <a:rPr sz="1400">
@@ -3433,7 +3433,7 @@
                 </a:solidFill>
                 <a:latin typeface="Consolas"/>
               </a:rPr>
-              <a:t>  78  </a:t>
+              <a:t>  86  </a:t>
             </a:r>
             <a:r>
               <a:rPr sz="1400">
@@ -3458,7 +3458,7 @@
                 </a:solidFill>
                 <a:latin typeface="Consolas"/>
               </a:rPr>
-              <a:t>  79  </a:t>
+              <a:t>  87  </a:t>
             </a:r>
             <a:r>
               <a:rPr sz="1400">
@@ -3483,7 +3483,7 @@
                 </a:solidFill>
                 <a:latin typeface="Consolas"/>
               </a:rPr>
-              <a:t>  80  </a:t>
+              <a:t>  88  </a:t>
             </a:r>
             <a:r>
               <a:rPr sz="1400">
@@ -3508,7 +3508,7 @@
                 </a:solidFill>
                 <a:latin typeface="Consolas"/>
               </a:rPr>
-              <a:t>  81  </a:t>
+              <a:t>  89  </a:t>
             </a:r>
             <a:r>
               <a:rPr sz="1400">
@@ -3533,7 +3533,7 @@
                 </a:solidFill>
                 <a:latin typeface="Consolas"/>
               </a:rPr>
-              <a:t>  82  </a:t>
+              <a:t>  90  </a:t>
             </a:r>
             <a:r>
               <a:rPr sz="1400">
@@ -3558,7 +3558,7 @@
                 </a:solidFill>
                 <a:latin typeface="Consolas"/>
               </a:rPr>
-              <a:t>  83  </a:t>
+              <a:t>  91  </a:t>
             </a:r>
             <a:r>
               <a:rPr sz="1400">
@@ -3583,7 +3583,7 @@
                 </a:solidFill>
                 <a:latin typeface="Consolas"/>
               </a:rPr>
-              <a:t>  84  </a:t>
+              <a:t>  92  </a:t>
             </a:r>
             <a:r>
               <a:rPr sz="1400">
@@ -3608,7 +3608,7 @@
                 </a:solidFill>
                 <a:latin typeface="Consolas"/>
               </a:rPr>
-              <a:t>  85  </a:t>
+              <a:t>  93  </a:t>
             </a:r>
             <a:r>
               <a:rPr sz="1400">
@@ -3715,7 +3715,7 @@
                 </a:solidFill>
                 <a:latin typeface="Consolas"/>
               </a:rPr>
-              <a:t>  86  </a:t>
+              <a:t>  94  </a:t>
             </a:r>
             <a:r>
               <a:rPr sz="1400">
@@ -3740,7 +3740,7 @@
                 </a:solidFill>
                 <a:latin typeface="Consolas"/>
               </a:rPr>
-              <a:t>  87  </a:t>
+              <a:t>  95  </a:t>
             </a:r>
             <a:r>
               <a:rPr sz="1400">
@@ -3765,7 +3765,7 @@
                 </a:solidFill>
                 <a:latin typeface="Consolas"/>
               </a:rPr>
-              <a:t>  88  </a:t>
+              <a:t>  96  </a:t>
             </a:r>
             <a:r>
               <a:rPr sz="1400">
@@ -3790,7 +3790,7 @@
                 </a:solidFill>
                 <a:latin typeface="Consolas"/>
               </a:rPr>
-              <a:t>  89  </a:t>
+              <a:t>  97  </a:t>
             </a:r>
             <a:r>
               <a:rPr sz="1400">
@@ -3815,7 +3815,7 @@
                 </a:solidFill>
                 <a:latin typeface="Consolas"/>
               </a:rPr>
-              <a:t>  90  </a:t>
+              <a:t>  98  </a:t>
             </a:r>
             <a:r>
               <a:rPr sz="1400">
@@ -3840,7 +3840,7 @@
                 </a:solidFill>
                 <a:latin typeface="Consolas"/>
               </a:rPr>
-              <a:t>  91  </a:t>
+              <a:t>  99  </a:t>
             </a:r>
             <a:r>
               <a:rPr sz="1400">
@@ -3865,7 +3865,7 @@
                 </a:solidFill>
                 <a:latin typeface="Consolas"/>
               </a:rPr>
-              <a:t>  92  </a:t>
+              <a:t> 100  </a:t>
             </a:r>
             <a:r>
               <a:rPr sz="1400">
@@ -3890,7 +3890,7 @@
                 </a:solidFill>
                 <a:latin typeface="Consolas"/>
               </a:rPr>
-              <a:t>  93  </a:t>
+              <a:t> 101  </a:t>
             </a:r>
             <a:r>
               <a:rPr sz="1400">
@@ -3915,7 +3915,7 @@
                 </a:solidFill>
                 <a:latin typeface="Consolas"/>
               </a:rPr>
-              <a:t>  94  </a:t>
+              <a:t> 102  </a:t>
             </a:r>
             <a:r>
               <a:rPr sz="1400">
@@ -3940,7 +3940,7 @@
                 </a:solidFill>
                 <a:latin typeface="Consolas"/>
               </a:rPr>
-              <a:t>  95  </a:t>
+              <a:t> 103  </a:t>
             </a:r>
             <a:r>
               <a:rPr sz="1400">
@@ -3965,7 +3965,7 @@
                 </a:solidFill>
                 <a:latin typeface="Consolas"/>
               </a:rPr>
-              <a:t>  96  </a:t>
+              <a:t> 104  </a:t>
             </a:r>
             <a:r>
               <a:rPr sz="1400">
@@ -3990,7 +3990,7 @@
                 </a:solidFill>
                 <a:latin typeface="Consolas"/>
               </a:rPr>
-              <a:t>  97  </a:t>
+              <a:t> 105  </a:t>
             </a:r>
             <a:r>
               <a:rPr sz="1400">
@@ -4015,7 +4015,7 @@
                 </a:solidFill>
                 <a:latin typeface="Consolas"/>
               </a:rPr>
-              <a:t>  98  </a:t>
+              <a:t> 106  </a:t>
             </a:r>
             <a:r>
               <a:rPr sz="1400">
@@ -4040,7 +4040,7 @@
                 </a:solidFill>
                 <a:latin typeface="Consolas"/>
               </a:rPr>
-              <a:t>  99  </a:t>
+              <a:t> 107  </a:t>
             </a:r>
             <a:r>
               <a:rPr sz="1400">
@@ -4065,7 +4065,7 @@
                 </a:solidFill>
                 <a:latin typeface="Consolas"/>
               </a:rPr>
-              <a:t> 100  </a:t>
+              <a:t> 108  </a:t>
             </a:r>
             <a:r>
               <a:rPr sz="1400">
@@ -4172,7 +4172,7 @@
                 </a:solidFill>
                 <a:latin typeface="Consolas"/>
               </a:rPr>
-              <a:t> 101  </a:t>
+              <a:t> 109  </a:t>
             </a:r>
             <a:r>
               <a:rPr sz="1700">
@@ -4197,7 +4197,7 @@
                 </a:solidFill>
                 <a:latin typeface="Consolas"/>
               </a:rPr>
-              <a:t> 102  </a:t>
+              <a:t> 110  </a:t>
             </a:r>
             <a:r>
               <a:rPr sz="1700">
@@ -4222,7 +4222,7 @@
                 </a:solidFill>
                 <a:latin typeface="Consolas"/>
               </a:rPr>
-              <a:t> 103  </a:t>
+              <a:t> 111  </a:t>
             </a:r>
             <a:r>
               <a:rPr sz="1700">
@@ -5735,7 +5735,7 @@
                 </a:solidFill>
                 <a:latin typeface="Consolas"/>
               </a:rPr>
-              <a:t>  11  </a:t>
+              <a:t>  16  </a:t>
             </a:r>
             <a:r>
               <a:rPr sz="1700">
@@ -5760,7 +5760,7 @@
                 </a:solidFill>
                 <a:latin typeface="Consolas"/>
               </a:rPr>
-              <a:t>  12  </a:t>
+              <a:t>  17  </a:t>
             </a:r>
             <a:r>
               <a:rPr sz="1700">
@@ -5785,7 +5785,7 @@
                 </a:solidFill>
                 <a:latin typeface="Consolas"/>
               </a:rPr>
-              <a:t>  13  </a:t>
+              <a:t>  18  </a:t>
             </a:r>
             <a:r>
               <a:rPr sz="1700">
@@ -5810,7 +5810,7 @@
                 </a:solidFill>
                 <a:latin typeface="Consolas"/>
               </a:rPr>
-              <a:t>  14  </a:t>
+              <a:t>  19  </a:t>
             </a:r>
             <a:r>
               <a:rPr sz="1700">
@@ -5835,7 +5835,7 @@
                 </a:solidFill>
                 <a:latin typeface="Consolas"/>
               </a:rPr>
-              <a:t>  15  </a:t>
+              <a:t>  20  </a:t>
             </a:r>
             <a:r>
               <a:rPr sz="1700">
@@ -5860,7 +5860,7 @@
                 </a:solidFill>
                 <a:latin typeface="Consolas"/>
               </a:rPr>
-              <a:t>  16  </a:t>
+              <a:t>  21  </a:t>
             </a:r>
             <a:r>
               <a:rPr sz="1700">
@@ -5885,7 +5885,7 @@
                 </a:solidFill>
                 <a:latin typeface="Consolas"/>
               </a:rPr>
-              <a:t>  17  </a:t>
+              <a:t>  22  </a:t>
             </a:r>
             <a:r>
               <a:rPr sz="1700">
@@ -5910,7 +5910,7 @@
                 </a:solidFill>
                 <a:latin typeface="Consolas"/>
               </a:rPr>
-              <a:t>  18  </a:t>
+              <a:t>  23  </a:t>
             </a:r>
             <a:r>
               <a:rPr sz="1700">
@@ -5935,7 +5935,7 @@
                 </a:solidFill>
                 <a:latin typeface="Consolas"/>
               </a:rPr>
-              <a:t>  19  </a:t>
+              <a:t>  24  </a:t>
             </a:r>
             <a:r>
               <a:rPr sz="1700">
@@ -5960,7 +5960,7 @@
                 </a:solidFill>
                 <a:latin typeface="Consolas"/>
               </a:rPr>
-              <a:t>  20  </a:t>
+              <a:t>  25  </a:t>
             </a:r>
             <a:r>
               <a:rPr sz="1700">
@@ -6067,7 +6067,7 @@
                 </a:solidFill>
                 <a:latin typeface="Consolas"/>
               </a:rPr>
-              <a:t> 104  </a:t>
+              <a:t> 112  </a:t>
             </a:r>
             <a:r>
               <a:rPr sz="1700">
@@ -6092,7 +6092,7 @@
                 </a:solidFill>
                 <a:latin typeface="Consolas"/>
               </a:rPr>
-              <a:t> 105  </a:t>
+              <a:t> 113  </a:t>
             </a:r>
             <a:r>
               <a:rPr sz="1700">
@@ -6117,7 +6117,7 @@
                 </a:solidFill>
                 <a:latin typeface="Consolas"/>
               </a:rPr>
-              <a:t> 106  </a:t>
+              <a:t> 114  </a:t>
             </a:r>
             <a:r>
               <a:rPr sz="1700">
@@ -6142,7 +6142,7 @@
                 </a:solidFill>
                 <a:latin typeface="Consolas"/>
               </a:rPr>
-              <a:t> 107  </a:t>
+              <a:t> 115  </a:t>
             </a:r>
             <a:r>
               <a:rPr sz="1700">
@@ -6167,7 +6167,7 @@
                 </a:solidFill>
                 <a:latin typeface="Consolas"/>
               </a:rPr>
-              <a:t> 108  </a:t>
+              <a:t> 116  </a:t>
             </a:r>
             <a:r>
               <a:rPr sz="1700">

--- a/ai101/slides/week-09.pptx
+++ b/ai101/slides/week-09.pptx
@@ -6072,7 +6072,7 @@
             <a:r>
               <a:rPr sz="1700">
                 <a:solidFill>
-                  <a:srgbClr val="DCECEF"/>
+                  <a:srgbClr val="7FE0A0"/>
                 </a:solidFill>
                 <a:latin typeface="Consolas"/>
               </a:rPr>

--- a/ai101/slides/week-09.pptx
+++ b/ai101/slides/week-09.pptx
@@ -3543,6 +3543,31 @@
                 <a:latin typeface="Consolas"/>
               </a:rPr>
               <a:t>    body: JSON.stringify({</a:t>
+            </a:r>
+          </a:p>
+          <a:p>
+            <a:pPr>
+              <a:spcAft>
+                <a:spcPts val="0"/>
+              </a:spcAft>
+            </a:pPr>
+            <a:r>
+              <a:rPr sz="1400">
+                <a:solidFill>
+                  <a:srgbClr val="6D8C97"/>
+                </a:solidFill>
+                <a:latin typeface="Consolas"/>
+              </a:rPr>
+              <a:t>   -  </a:t>
+            </a:r>
+            <a:r>
+              <a:rPr sz="1400" strike="sngStrike">
+                <a:solidFill>
+                  <a:srgbClr val="F3928B"/>
+                </a:solidFill>
+                <a:latin typeface="Consolas"/>
+              </a:rPr>
+              <a:t>      model: 'fast',</a:t>
             </a:r>
           </a:p>
           <a:p>

--- a/ai101/slides/week-09.pptx
+++ b/ai101/slides/week-09.pptx
@@ -3518,6 +3518,21 @@
               </a:spcAft>
             </a:pPr>
             <a:r>
+              <a:rPr sz="2800">
+                <a:solidFill>
+                  <a:srgbClr val="01AEFD"/>
+                </a:solidFill>
+              </a:rPr>
+              <a:t>&lt;option value="fast"&gt;fast&lt;/option&gt;</a:t>
+            </a:r>
+          </a:p>
+          <a:p>
+            <a:pPr>
+              <a:spcAft>
+                <a:spcPts val="1400"/>
+              </a:spcAft>
+            </a:pPr>
+            <a:r>
               <a:rPr sz="2400">
                 <a:solidFill>
                   <a:srgbClr val="1F2A37"/>
@@ -3538,7 +3553,22 @@
                   <a:srgbClr val="1F2A37"/>
                 </a:solidFill>
               </a:rPr>
-              <a:t>• Its value= is what the code actually sends.</a:t>
+              <a:t>• Its value= is what the code actually sends - here, the model name.</a:t>
+            </a:r>
+          </a:p>
+          <a:p>
+            <a:pPr>
+              <a:spcAft>
+                <a:spcPts val="1400"/>
+              </a:spcAft>
+            </a:pPr>
+            <a:r>
+              <a:rPr sz="2400">
+                <a:solidFill>
+                  <a:srgbClr val="1F2A37"/>
+                </a:solidFill>
+              </a:rPr>
+              <a:t>• Like the value= on an &lt;input&gt;, but picked from a list.</a:t>
             </a:r>
           </a:p>
         </p:txBody>
@@ -4758,6 +4788,21 @@
               </a:spcAft>
             </a:pPr>
             <a:r>
+              <a:rPr sz="2800">
+                <a:solidFill>
+                  <a:srgbClr val="01AEFD"/>
+                </a:solidFill>
+              </a:rPr>
+              <a:t>&lt;output id="tempOut"&gt;0.7&lt;/output&gt;</a:t>
+            </a:r>
+          </a:p>
+          <a:p>
+            <a:pPr>
+              <a:spcAft>
+                <a:spcPts val="1400"/>
+              </a:spcAft>
+            </a:pPr>
+            <a:r>
               <a:rPr sz="2400">
                 <a:solidFill>
                   <a:srgbClr val="1F2A37"/>
@@ -4778,7 +4823,22 @@
                   <a:srgbClr val="1F2A37"/>
                 </a:solidFill>
               </a:rPr>
-              <a:t>• Here it shows the slider's current number.</a:t>
+              <a:t>• You fill it from code with .textContent (week 2).</a:t>
+            </a:r>
+          </a:p>
+          <a:p>
+            <a:pPr>
+              <a:spcAft>
+                <a:spcPts val="1400"/>
+              </a:spcAft>
+            </a:pPr>
+            <a:r>
+              <a:rPr sz="2400">
+                <a:solidFill>
+                  <a:srgbClr val="1F2A37"/>
+                </a:solidFill>
+              </a:rPr>
+              <a:t>• Here it shows the slider's number so the setting means something.</a:t>
             </a:r>
           </a:p>
         </p:txBody>
@@ -7420,12 +7480,57 @@
               </a:spcAft>
             </a:pPr>
             <a:r>
+              <a:rPr sz="2800">
+                <a:solidFill>
+                  <a:srgbClr val="01AEFD"/>
+                </a:solidFill>
+              </a:rPr>
+              <a:t>flex-wrap: wrap;</a:t>
+            </a:r>
+          </a:p>
+          <a:p>
+            <a:pPr>
+              <a:spcAft>
+                <a:spcPts val="1400"/>
+              </a:spcAft>
+            </a:pPr>
+            <a:r>
               <a:rPr sz="2400">
                 <a:solidFill>
                   <a:srgbClr val="1F2A37"/>
                 </a:solidFill>
               </a:rPr>
-              <a:t>• Lets a flex row spill onto a new line when it runs out of room, instead of squashing.</a:t>
+              <a:t>• Lets a flex ROW (week 2) spill onto a new line when it runs out of room.</a:t>
+            </a:r>
+          </a:p>
+          <a:p>
+            <a:pPr>
+              <a:spcAft>
+                <a:spcPts val="1400"/>
+              </a:spcAft>
+            </a:pPr>
+            <a:r>
+              <a:rPr sz="2400">
+                <a:solidFill>
+                  <a:srgbClr val="1F2A37"/>
+                </a:solidFill>
+              </a:rPr>
+              <a:t>• Without it the items just squash to fit.</a:t>
+            </a:r>
+          </a:p>
+          <a:p>
+            <a:pPr>
+              <a:spcAft>
+                <a:spcPts val="1400"/>
+              </a:spcAft>
+            </a:pPr>
+            <a:r>
+              <a:rPr sz="2400">
+                <a:solidFill>
+                  <a:srgbClr val="1F2A37"/>
+                </a:solidFill>
+              </a:rPr>
+              <a:t>• Keeps the settings usable on a narrow screen.</a:t>
             </a:r>
           </a:p>
         </p:txBody>
@@ -14985,12 +15090,27 @@
               </a:spcAft>
             </a:pPr>
             <a:r>
+              <a:rPr sz="2800">
+                <a:solidFill>
+                  <a:srgbClr val="01AEFD"/>
+                </a:solidFill>
+              </a:rPr>
+              <a:t>&lt;label&gt;Brain &lt;select&gt;...&lt;/select&gt;&lt;/label&gt;</a:t>
+            </a:r>
+          </a:p>
+          <a:p>
+            <a:pPr>
+              <a:spcAft>
+                <a:spcPts val="1400"/>
+              </a:spcAft>
+            </a:pPr>
+            <a:r>
               <a:rPr sz="2400">
                 <a:solidFill>
                   <a:srgbClr val="1F2A37"/>
                 </a:solidFill>
               </a:rPr>
-              <a:t>• Ties a bit of text to a control.</a:t>
+              <a:t>• Ties a piece of text to a control (an input or a dropdown).</a:t>
             </a:r>
           </a:p>
           <a:p>
@@ -15006,6 +15126,21 @@
                 </a:solidFill>
               </a:rPr>
               <a:t>• Clicking the text focuses the control it wraps.</a:t>
+            </a:r>
+          </a:p>
+          <a:p>
+            <a:pPr>
+              <a:spcAft>
+                <a:spcPts val="1400"/>
+              </a:spcAft>
+            </a:pPr>
+            <a:r>
+              <a:rPr sz="2400">
+                <a:solidFill>
+                  <a:srgbClr val="1F2A37"/>
+                </a:solidFill>
+              </a:rPr>
+              <a:t>• It groups things the way &lt;form&gt; (week 2) grouped the box and button.</a:t>
             </a:r>
           </a:p>
         </p:txBody>
@@ -15305,6 +15440,21 @@
               </a:spcAft>
             </a:pPr>
             <a:r>
+              <a:rPr sz="2800">
+                <a:solidFill>
+                  <a:srgbClr val="01AEFD"/>
+                </a:solidFill>
+              </a:rPr>
+              <a:t>&lt;select id="model"&gt; ... &lt;/select&gt;</a:t>
+            </a:r>
+          </a:p>
+          <a:p>
+            <a:pPr>
+              <a:spcAft>
+                <a:spcPts val="1400"/>
+              </a:spcAft>
+            </a:pPr>
+            <a:r>
               <a:rPr sz="2400">
                 <a:solidFill>
                   <a:srgbClr val="1F2A37"/>
@@ -15325,7 +15475,22 @@
                   <a:srgbClr val="1F2A37"/>
                 </a:solidFill>
               </a:rPr>
-              <a:t>• Whatever the student picks, the code reads from its value.</a:t>
+              <a:t>• Whatever the student picks, the code reads with .value (week 2).</a:t>
+            </a:r>
+          </a:p>
+          <a:p>
+            <a:pPr>
+              <a:spcAft>
+                <a:spcPts val="1400"/>
+              </a:spcAft>
+            </a:pPr>
+            <a:r>
+              <a:rPr sz="2400">
+                <a:solidFill>
+                  <a:srgbClr val="1F2A37"/>
+                </a:solidFill>
+              </a:rPr>
+              <a:t>• Each choice inside it is an &lt;option&gt;.</a:t>
             </a:r>
           </a:p>
         </p:txBody>

--- a/ai101/slides/week-09.pptx
+++ b/ai101/slides/week-09.pptx
@@ -7414,7 +7414,7 @@
                   <a:srgbClr val="1F2A37"/>
                 </a:solidFill>
               </a:rPr>
-              <a:t>flex-wrap: wrap</a:t>
+              <a:t>flex-wrap</a:t>
             </a:r>
           </a:p>
         </p:txBody>
